--- a/images/UI_Images.pptx
+++ b/images/UI_Images.pptx
@@ -9,9 +9,10 @@
     <p:sldId id="257" r:id="rId3"/>
     <p:sldId id="258" r:id="rId4"/>
     <p:sldId id="260" r:id="rId5"/>
-    <p:sldId id="262" r:id="rId6"/>
-    <p:sldId id="259" r:id="rId7"/>
-    <p:sldId id="261" r:id="rId8"/>
+    <p:sldId id="263" r:id="rId6"/>
+    <p:sldId id="262" r:id="rId7"/>
+    <p:sldId id="259" r:id="rId8"/>
+    <p:sldId id="261" r:id="rId9"/>
   </p:sldIdLst>
   <p:sldSz cx="12192000" cy="6858000"/>
   <p:notesSz cx="6858000" cy="9144000"/>
@@ -276,7 +277,7 @@
           <a:p>
             <a:fld id="{EB1E8BE4-B75A-4C8C-85FD-EB4395A6F29D}" type="datetimeFigureOut">
               <a:rPr lang="en-US" smtClean="0"/>
-              <a:t>6/2/2022</a:t>
+              <a:t>6/6/2022</a:t>
             </a:fld>
             <a:endParaRPr lang="en-US"/>
           </a:p>
@@ -474,7 +475,7 @@
           <a:p>
             <a:fld id="{EB1E8BE4-B75A-4C8C-85FD-EB4395A6F29D}" type="datetimeFigureOut">
               <a:rPr lang="en-US" smtClean="0"/>
-              <a:t>6/2/2022</a:t>
+              <a:t>6/6/2022</a:t>
             </a:fld>
             <a:endParaRPr lang="en-US"/>
           </a:p>
@@ -682,7 +683,7 @@
           <a:p>
             <a:fld id="{EB1E8BE4-B75A-4C8C-85FD-EB4395A6F29D}" type="datetimeFigureOut">
               <a:rPr lang="en-US" smtClean="0"/>
-              <a:t>6/2/2022</a:t>
+              <a:t>6/6/2022</a:t>
             </a:fld>
             <a:endParaRPr lang="en-US"/>
           </a:p>
@@ -880,7 +881,7 @@
           <a:p>
             <a:fld id="{EB1E8BE4-B75A-4C8C-85FD-EB4395A6F29D}" type="datetimeFigureOut">
               <a:rPr lang="en-US" smtClean="0"/>
-              <a:t>6/2/2022</a:t>
+              <a:t>6/6/2022</a:t>
             </a:fld>
             <a:endParaRPr lang="en-US"/>
           </a:p>
@@ -1155,7 +1156,7 @@
           <a:p>
             <a:fld id="{EB1E8BE4-B75A-4C8C-85FD-EB4395A6F29D}" type="datetimeFigureOut">
               <a:rPr lang="en-US" smtClean="0"/>
-              <a:t>6/2/2022</a:t>
+              <a:t>6/6/2022</a:t>
             </a:fld>
             <a:endParaRPr lang="en-US"/>
           </a:p>
@@ -1420,7 +1421,7 @@
           <a:p>
             <a:fld id="{EB1E8BE4-B75A-4C8C-85FD-EB4395A6F29D}" type="datetimeFigureOut">
               <a:rPr lang="en-US" smtClean="0"/>
-              <a:t>6/2/2022</a:t>
+              <a:t>6/6/2022</a:t>
             </a:fld>
             <a:endParaRPr lang="en-US"/>
           </a:p>
@@ -1832,7 +1833,7 @@
           <a:p>
             <a:fld id="{EB1E8BE4-B75A-4C8C-85FD-EB4395A6F29D}" type="datetimeFigureOut">
               <a:rPr lang="en-US" smtClean="0"/>
-              <a:t>6/2/2022</a:t>
+              <a:t>6/6/2022</a:t>
             </a:fld>
             <a:endParaRPr lang="en-US"/>
           </a:p>
@@ -1973,7 +1974,7 @@
           <a:p>
             <a:fld id="{EB1E8BE4-B75A-4C8C-85FD-EB4395A6F29D}" type="datetimeFigureOut">
               <a:rPr lang="en-US" smtClean="0"/>
-              <a:t>6/2/2022</a:t>
+              <a:t>6/6/2022</a:t>
             </a:fld>
             <a:endParaRPr lang="en-US"/>
           </a:p>
@@ -2086,7 +2087,7 @@
           <a:p>
             <a:fld id="{EB1E8BE4-B75A-4C8C-85FD-EB4395A6F29D}" type="datetimeFigureOut">
               <a:rPr lang="en-US" smtClean="0"/>
-              <a:t>6/2/2022</a:t>
+              <a:t>6/6/2022</a:t>
             </a:fld>
             <a:endParaRPr lang="en-US"/>
           </a:p>
@@ -2397,7 +2398,7 @@
           <a:p>
             <a:fld id="{EB1E8BE4-B75A-4C8C-85FD-EB4395A6F29D}" type="datetimeFigureOut">
               <a:rPr lang="en-US" smtClean="0"/>
-              <a:t>6/2/2022</a:t>
+              <a:t>6/6/2022</a:t>
             </a:fld>
             <a:endParaRPr lang="en-US"/>
           </a:p>
@@ -2685,7 +2686,7 @@
           <a:p>
             <a:fld id="{EB1E8BE4-B75A-4C8C-85FD-EB4395A6F29D}" type="datetimeFigureOut">
               <a:rPr lang="en-US" smtClean="0"/>
-              <a:t>6/2/2022</a:t>
+              <a:t>6/6/2022</a:t>
             </a:fld>
             <a:endParaRPr lang="en-US"/>
           </a:p>
@@ -2926,7 +2927,7 @@
           <a:p>
             <a:fld id="{EB1E8BE4-B75A-4C8C-85FD-EB4395A6F29D}" type="datetimeFigureOut">
               <a:rPr lang="en-US" smtClean="0"/>
-              <a:t>6/2/2022</a:t>
+              <a:t>6/6/2022</a:t>
             </a:fld>
             <a:endParaRPr lang="en-US"/>
           </a:p>
@@ -3740,10 +3741,10 @@
       </p:grpSpPr>
       <p:grpSp>
         <p:nvGrpSpPr>
-          <p:cNvPr id="97" name="Group 96">
+          <p:cNvPr id="6" name="Group 5">
             <a:extLst>
               <a:ext uri="{FF2B5EF4-FFF2-40B4-BE49-F238E27FC236}">
-                <a16:creationId xmlns:a16="http://schemas.microsoft.com/office/drawing/2014/main" id="{C854FD94-170E-2F5A-B05F-68675C31A92E}"/>
+                <a16:creationId xmlns:a16="http://schemas.microsoft.com/office/drawing/2014/main" id="{569AC0E3-1A6E-76F0-7C67-9C565C7FF2D1}"/>
               </a:ext>
             </a:extLst>
           </p:cNvPr>
@@ -3752,72 +3753,2368 @@
         </p:nvGrpSpPr>
         <p:grpSpPr>
           <a:xfrm>
-            <a:off x="2576945" y="1246909"/>
-            <a:ext cx="5328063" cy="4011881"/>
-            <a:chOff x="3422520" y="1512380"/>
-            <a:chExt cx="5328063" cy="4011881"/>
+            <a:off x="2576945" y="1019656"/>
+            <a:ext cx="5328063" cy="4215811"/>
+            <a:chOff x="2576945" y="1019656"/>
+            <a:chExt cx="5328063" cy="4215811"/>
           </a:xfrm>
         </p:grpSpPr>
-        <p:pic>
-          <p:nvPicPr>
-            <p:cNvPr id="4" name="Picture 3">
+        <p:grpSp>
+          <p:nvGrpSpPr>
+            <p:cNvPr id="97" name="Group 96">
               <a:extLst>
                 <a:ext uri="{FF2B5EF4-FFF2-40B4-BE49-F238E27FC236}">
-                  <a16:creationId xmlns:a16="http://schemas.microsoft.com/office/drawing/2014/main" id="{602DE3F0-5DB6-B4D0-4012-227AC31FA655}"/>
+                  <a16:creationId xmlns:a16="http://schemas.microsoft.com/office/drawing/2014/main" id="{C854FD94-170E-2F5A-B05F-68675C31A92E}"/>
                 </a:ext>
               </a:extLst>
             </p:cNvPr>
-            <p:cNvPicPr>
-              <a:picLocks noChangeAspect="1"/>
-            </p:cNvPicPr>
+            <p:cNvGrpSpPr/>
             <p:nvPr/>
-          </p:nvPicPr>
-          <p:blipFill rotWithShape="1">
-            <a:blip r:embed="rId2">
-              <a:extLst>
-                <a:ext uri="{BEBA8EAE-BF5A-486C-A8C5-ECC9F3942E4B}">
-                  <a14:imgProps xmlns:a14="http://schemas.microsoft.com/office/drawing/2010/main">
-                    <a14:imgLayer r:embed="rId3">
-                      <a14:imgEffect>
-                        <a14:backgroundRemoval t="10000" b="90000" l="10000" r="90000">
-                          <a14:backgroundMark x1="40889" y1="38400" x2="42222" y2="39644"/>
-                          <a14:backgroundMark x1="40267" y1="38044" x2="39644" y2="38489"/>
-                          <a14:backgroundMark x1="39733" y1="32533" x2="42311" y2="30489"/>
-                          <a14:backgroundMark x1="40978" y1="30667" x2="40089" y2="31644"/>
-                          <a14:backgroundMark x1="26489" y1="59111" x2="26222" y2="59200"/>
-                          <a14:backgroundMark x1="34222" y1="51378" x2="34489" y2="51644"/>
-                          <a14:backgroundMark x1="48444" y1="60800" x2="50667" y2="57956"/>
-                          <a14:backgroundMark x1="56356" y1="61067" x2="59022" y2="57778"/>
-                          <a14:backgroundMark x1="33600" y1="51289" x2="33778" y2="51467"/>
-                          <a14:backgroundMark x1="58578" y1="45244" x2="58756" y2="45422"/>
-                          <a14:backgroundMark x1="74756" y1="37333" x2="74844" y2="37689"/>
-                          <a14:backgroundMark x1="26400" y1="57867" x2="25333" y2="59822"/>
-                        </a14:backgroundRemoval>
-                      </a14:imgEffect>
-                    </a14:imgLayer>
-                  </a14:imgProps>
-                </a:ext>
-              </a:extLst>
-            </a:blip>
-            <a:srcRect l="11017" t="21137" r="11292" b="20364"/>
-            <a:stretch/>
-          </p:blipFill>
-          <p:spPr>
+          </p:nvGrpSpPr>
+          <p:grpSpPr>
             <a:xfrm>
-              <a:off x="3422520" y="1512380"/>
+              <a:off x="2576945" y="1223586"/>
               <a:ext cx="5328063" cy="4011881"/>
+              <a:chOff x="3422520" y="1512380"/>
+              <a:chExt cx="5328063" cy="4011881"/>
             </a:xfrm>
-            <a:prstGeom prst="rect">
-              <a:avLst/>
-            </a:prstGeom>
-          </p:spPr>
-        </p:pic>
+          </p:grpSpPr>
+          <p:pic>
+            <p:nvPicPr>
+              <p:cNvPr id="4" name="Picture 3">
+                <a:extLst>
+                  <a:ext uri="{FF2B5EF4-FFF2-40B4-BE49-F238E27FC236}">
+                    <a16:creationId xmlns:a16="http://schemas.microsoft.com/office/drawing/2014/main" id="{602DE3F0-5DB6-B4D0-4012-227AC31FA655}"/>
+                  </a:ext>
+                </a:extLst>
+              </p:cNvPr>
+              <p:cNvPicPr>
+                <a:picLocks noChangeAspect="1"/>
+              </p:cNvPicPr>
+              <p:nvPr/>
+            </p:nvPicPr>
+            <p:blipFill rotWithShape="1">
+              <a:blip r:embed="rId2">
+                <a:duotone>
+                  <a:schemeClr val="accent6">
+                    <a:shade val="45000"/>
+                    <a:satMod val="135000"/>
+                  </a:schemeClr>
+                  <a:prstClr val="white"/>
+                </a:duotone>
+                <a:extLst>
+                  <a:ext uri="{BEBA8EAE-BF5A-486C-A8C5-ECC9F3942E4B}">
+                    <a14:imgProps xmlns:a14="http://schemas.microsoft.com/office/drawing/2010/main">
+                      <a14:imgLayer r:embed="rId3">
+                        <a14:imgEffect>
+                          <a14:backgroundRemoval t="10000" b="90000" l="10000" r="90000">
+                            <a14:backgroundMark x1="40889" y1="38400" x2="42222" y2="39644"/>
+                            <a14:backgroundMark x1="40267" y1="38044" x2="39644" y2="38489"/>
+                            <a14:backgroundMark x1="39733" y1="32533" x2="42311" y2="30489"/>
+                            <a14:backgroundMark x1="40978" y1="30667" x2="40089" y2="31644"/>
+                            <a14:backgroundMark x1="26489" y1="59111" x2="26222" y2="59200"/>
+                            <a14:backgroundMark x1="34222" y1="51378" x2="34489" y2="51644"/>
+                            <a14:backgroundMark x1="48444" y1="60800" x2="50667" y2="57956"/>
+                            <a14:backgroundMark x1="56356" y1="61067" x2="59022" y2="57778"/>
+                            <a14:backgroundMark x1="33600" y1="51289" x2="33778" y2="51467"/>
+                            <a14:backgroundMark x1="58578" y1="45244" x2="58756" y2="45422"/>
+                            <a14:backgroundMark x1="74756" y1="37333" x2="74844" y2="37689"/>
+                            <a14:backgroundMark x1="26400" y1="57867" x2="25333" y2="59822"/>
+                          </a14:backgroundRemoval>
+                        </a14:imgEffect>
+                      </a14:imgLayer>
+                    </a14:imgProps>
+                  </a:ext>
+                </a:extLst>
+              </a:blip>
+              <a:srcRect l="11017" t="21137" r="11292" b="20364"/>
+              <a:stretch/>
+            </p:blipFill>
+            <p:spPr>
+              <a:xfrm>
+                <a:off x="3422520" y="1512380"/>
+                <a:ext cx="5328063" cy="4011881"/>
+              </a:xfrm>
+              <a:prstGeom prst="rect">
+                <a:avLst/>
+              </a:prstGeom>
+            </p:spPr>
+          </p:pic>
+          <p:sp>
+            <p:nvSpPr>
+              <p:cNvPr id="8" name="Flowchart: Connector 7">
+                <a:extLst>
+                  <a:ext uri="{FF2B5EF4-FFF2-40B4-BE49-F238E27FC236}">
+                    <a16:creationId xmlns:a16="http://schemas.microsoft.com/office/drawing/2014/main" id="{29FD885F-7905-9962-5E05-37CB1C87C7BF}"/>
+                  </a:ext>
+                </a:extLst>
+              </p:cNvPr>
+              <p:cNvSpPr/>
+              <p:nvPr/>
+            </p:nvSpPr>
+            <p:spPr>
+              <a:xfrm>
+                <a:off x="4775116" y="3474350"/>
+                <a:ext cx="414119" cy="397284"/>
+              </a:xfrm>
+              <a:prstGeom prst="flowChartConnector">
+                <a:avLst/>
+              </a:prstGeom>
+              <a:solidFill>
+                <a:schemeClr val="bg1"/>
+              </a:solidFill>
+              <a:ln>
+                <a:solidFill>
+                  <a:schemeClr val="tx1"/>
+                </a:solidFill>
+              </a:ln>
+            </p:spPr>
+            <p:style>
+              <a:lnRef idx="2">
+                <a:schemeClr val="accent1">
+                  <a:shade val="50000"/>
+                </a:schemeClr>
+              </a:lnRef>
+              <a:fillRef idx="1">
+                <a:schemeClr val="accent1"/>
+              </a:fillRef>
+              <a:effectRef idx="0">
+                <a:schemeClr val="accent1"/>
+              </a:effectRef>
+              <a:fontRef idx="minor">
+                <a:schemeClr val="lt1"/>
+              </a:fontRef>
+            </p:style>
+            <p:txBody>
+              <a:bodyPr rtlCol="0" anchor="ctr"/>
+              <a:lstStyle/>
+              <a:p>
+                <a:pPr algn="ctr"/>
+                <a:endParaRPr lang="en-US"/>
+              </a:p>
+            </p:txBody>
+          </p:sp>
+          <p:sp>
+            <p:nvSpPr>
+              <p:cNvPr id="9" name="Flowchart: Connector 8">
+                <a:extLst>
+                  <a:ext uri="{FF2B5EF4-FFF2-40B4-BE49-F238E27FC236}">
+                    <a16:creationId xmlns:a16="http://schemas.microsoft.com/office/drawing/2014/main" id="{B99C08BB-5EF7-55F4-0AE3-A504762565EE}"/>
+                  </a:ext>
+                </a:extLst>
+              </p:cNvPr>
+              <p:cNvSpPr/>
+              <p:nvPr/>
+            </p:nvSpPr>
+            <p:spPr>
+              <a:xfrm>
+                <a:off x="4779725" y="3946229"/>
+                <a:ext cx="414119" cy="397284"/>
+              </a:xfrm>
+              <a:prstGeom prst="flowChartConnector">
+                <a:avLst/>
+              </a:prstGeom>
+              <a:solidFill>
+                <a:schemeClr val="bg1"/>
+              </a:solidFill>
+              <a:ln>
+                <a:solidFill>
+                  <a:schemeClr val="tx1"/>
+                </a:solidFill>
+              </a:ln>
+            </p:spPr>
+            <p:style>
+              <a:lnRef idx="2">
+                <a:schemeClr val="accent1">
+                  <a:shade val="50000"/>
+                </a:schemeClr>
+              </a:lnRef>
+              <a:fillRef idx="1">
+                <a:schemeClr val="accent1"/>
+              </a:fillRef>
+              <a:effectRef idx="0">
+                <a:schemeClr val="accent1"/>
+              </a:effectRef>
+              <a:fontRef idx="minor">
+                <a:schemeClr val="lt1"/>
+              </a:fontRef>
+            </p:style>
+            <p:txBody>
+              <a:bodyPr rtlCol="0" anchor="ctr"/>
+              <a:lstStyle/>
+              <a:p>
+                <a:pPr algn="ctr"/>
+                <a:endParaRPr lang="en-US"/>
+              </a:p>
+            </p:txBody>
+          </p:sp>
+          <p:sp>
+            <p:nvSpPr>
+              <p:cNvPr id="10" name="Flowchart: Connector 9">
+                <a:extLst>
+                  <a:ext uri="{FF2B5EF4-FFF2-40B4-BE49-F238E27FC236}">
+                    <a16:creationId xmlns:a16="http://schemas.microsoft.com/office/drawing/2014/main" id="{F475BB46-C7CE-DEE0-BFCD-1556326F44C0}"/>
+                  </a:ext>
+                </a:extLst>
+              </p:cNvPr>
+              <p:cNvSpPr/>
+              <p:nvPr/>
+            </p:nvSpPr>
+            <p:spPr>
+              <a:xfrm>
+                <a:off x="5343992" y="3946229"/>
+                <a:ext cx="414119" cy="397284"/>
+              </a:xfrm>
+              <a:prstGeom prst="flowChartConnector">
+                <a:avLst/>
+              </a:prstGeom>
+              <a:solidFill>
+                <a:schemeClr val="bg1"/>
+              </a:solidFill>
+              <a:ln>
+                <a:solidFill>
+                  <a:schemeClr val="tx1"/>
+                </a:solidFill>
+              </a:ln>
+            </p:spPr>
+            <p:style>
+              <a:lnRef idx="2">
+                <a:schemeClr val="accent1">
+                  <a:shade val="50000"/>
+                </a:schemeClr>
+              </a:lnRef>
+              <a:fillRef idx="1">
+                <a:schemeClr val="accent1"/>
+              </a:fillRef>
+              <a:effectRef idx="0">
+                <a:schemeClr val="accent1"/>
+              </a:effectRef>
+              <a:fontRef idx="minor">
+                <a:schemeClr val="lt1"/>
+              </a:fontRef>
+            </p:style>
+            <p:txBody>
+              <a:bodyPr rtlCol="0" anchor="ctr"/>
+              <a:lstStyle/>
+              <a:p>
+                <a:pPr algn="ctr"/>
+                <a:endParaRPr lang="en-US"/>
+              </a:p>
+            </p:txBody>
+          </p:sp>
+          <p:sp>
+            <p:nvSpPr>
+              <p:cNvPr id="11" name="Flowchart: Connector 10">
+                <a:extLst>
+                  <a:ext uri="{FF2B5EF4-FFF2-40B4-BE49-F238E27FC236}">
+                    <a16:creationId xmlns:a16="http://schemas.microsoft.com/office/drawing/2014/main" id="{EA6E9BFC-F847-C1D5-A613-841981EEE210}"/>
+                  </a:ext>
+                </a:extLst>
+              </p:cNvPr>
+              <p:cNvSpPr/>
+              <p:nvPr/>
+            </p:nvSpPr>
+            <p:spPr>
+              <a:xfrm>
+                <a:off x="5908259" y="3946230"/>
+                <a:ext cx="414119" cy="397284"/>
+              </a:xfrm>
+              <a:prstGeom prst="flowChartConnector">
+                <a:avLst/>
+              </a:prstGeom>
+              <a:solidFill>
+                <a:schemeClr val="bg1"/>
+              </a:solidFill>
+              <a:ln>
+                <a:solidFill>
+                  <a:schemeClr val="tx1"/>
+                </a:solidFill>
+              </a:ln>
+            </p:spPr>
+            <p:style>
+              <a:lnRef idx="2">
+                <a:schemeClr val="accent1">
+                  <a:shade val="50000"/>
+                </a:schemeClr>
+              </a:lnRef>
+              <a:fillRef idx="1">
+                <a:schemeClr val="accent1"/>
+              </a:fillRef>
+              <a:effectRef idx="0">
+                <a:schemeClr val="accent1"/>
+              </a:effectRef>
+              <a:fontRef idx="minor">
+                <a:schemeClr val="lt1"/>
+              </a:fontRef>
+            </p:style>
+            <p:txBody>
+              <a:bodyPr rtlCol="0" anchor="ctr"/>
+              <a:lstStyle/>
+              <a:p>
+                <a:pPr algn="ctr"/>
+                <a:endParaRPr lang="en-US"/>
+              </a:p>
+            </p:txBody>
+          </p:sp>
+          <p:sp>
+            <p:nvSpPr>
+              <p:cNvPr id="12" name="Flowchart: Connector 11">
+                <a:extLst>
+                  <a:ext uri="{FF2B5EF4-FFF2-40B4-BE49-F238E27FC236}">
+                    <a16:creationId xmlns:a16="http://schemas.microsoft.com/office/drawing/2014/main" id="{471C54F4-B758-CB6B-FF0D-D7A9BBE8C8C0}"/>
+                  </a:ext>
+                </a:extLst>
+              </p:cNvPr>
+              <p:cNvSpPr/>
+              <p:nvPr/>
+            </p:nvSpPr>
+            <p:spPr>
+              <a:xfrm>
+                <a:off x="6472526" y="3946229"/>
+                <a:ext cx="414119" cy="397284"/>
+              </a:xfrm>
+              <a:prstGeom prst="flowChartConnector">
+                <a:avLst/>
+              </a:prstGeom>
+              <a:solidFill>
+                <a:schemeClr val="bg1"/>
+              </a:solidFill>
+              <a:ln>
+                <a:solidFill>
+                  <a:schemeClr val="tx1"/>
+                </a:solidFill>
+              </a:ln>
+            </p:spPr>
+            <p:style>
+              <a:lnRef idx="2">
+                <a:schemeClr val="accent1">
+                  <a:shade val="50000"/>
+                </a:schemeClr>
+              </a:lnRef>
+              <a:fillRef idx="1">
+                <a:schemeClr val="accent1"/>
+              </a:fillRef>
+              <a:effectRef idx="0">
+                <a:schemeClr val="accent1"/>
+              </a:effectRef>
+              <a:fontRef idx="minor">
+                <a:schemeClr val="lt1"/>
+              </a:fontRef>
+            </p:style>
+            <p:txBody>
+              <a:bodyPr rtlCol="0" anchor="ctr"/>
+              <a:lstStyle/>
+              <a:p>
+                <a:pPr algn="ctr"/>
+                <a:endParaRPr lang="en-US"/>
+              </a:p>
+            </p:txBody>
+          </p:sp>
+          <p:sp>
+            <p:nvSpPr>
+              <p:cNvPr id="13" name="Flowchart: Connector 12">
+                <a:extLst>
+                  <a:ext uri="{FF2B5EF4-FFF2-40B4-BE49-F238E27FC236}">
+                    <a16:creationId xmlns:a16="http://schemas.microsoft.com/office/drawing/2014/main" id="{C06E7DBF-FDB7-C7B0-87A6-01D851D7EDA5}"/>
+                  </a:ext>
+                </a:extLst>
+              </p:cNvPr>
+              <p:cNvSpPr/>
+              <p:nvPr/>
+            </p:nvSpPr>
+            <p:spPr>
+              <a:xfrm>
+                <a:off x="7020649" y="3946229"/>
+                <a:ext cx="414119" cy="397284"/>
+              </a:xfrm>
+              <a:prstGeom prst="flowChartConnector">
+                <a:avLst/>
+              </a:prstGeom>
+              <a:solidFill>
+                <a:schemeClr val="bg1"/>
+              </a:solidFill>
+              <a:ln>
+                <a:solidFill>
+                  <a:schemeClr val="tx1"/>
+                </a:solidFill>
+              </a:ln>
+            </p:spPr>
+            <p:style>
+              <a:lnRef idx="2">
+                <a:schemeClr val="accent1">
+                  <a:shade val="50000"/>
+                </a:schemeClr>
+              </a:lnRef>
+              <a:fillRef idx="1">
+                <a:schemeClr val="accent1"/>
+              </a:fillRef>
+              <a:effectRef idx="0">
+                <a:schemeClr val="accent1"/>
+              </a:effectRef>
+              <a:fontRef idx="minor">
+                <a:schemeClr val="lt1"/>
+              </a:fontRef>
+            </p:style>
+            <p:txBody>
+              <a:bodyPr rtlCol="0" anchor="ctr"/>
+              <a:lstStyle/>
+              <a:p>
+                <a:pPr algn="ctr"/>
+                <a:endParaRPr lang="en-US"/>
+              </a:p>
+            </p:txBody>
+          </p:sp>
+          <p:sp>
+            <p:nvSpPr>
+              <p:cNvPr id="14" name="Flowchart: Connector 13">
+                <a:extLst>
+                  <a:ext uri="{FF2B5EF4-FFF2-40B4-BE49-F238E27FC236}">
+                    <a16:creationId xmlns:a16="http://schemas.microsoft.com/office/drawing/2014/main" id="{87A5106C-1DFF-CE7B-F02C-BABE5714041B}"/>
+                  </a:ext>
+                </a:extLst>
+              </p:cNvPr>
+              <p:cNvSpPr/>
+              <p:nvPr/>
+            </p:nvSpPr>
+            <p:spPr>
+              <a:xfrm>
+                <a:off x="5343992" y="3474350"/>
+                <a:ext cx="414119" cy="397284"/>
+              </a:xfrm>
+              <a:prstGeom prst="flowChartConnector">
+                <a:avLst/>
+              </a:prstGeom>
+              <a:solidFill>
+                <a:schemeClr val="bg1"/>
+              </a:solidFill>
+              <a:ln>
+                <a:solidFill>
+                  <a:schemeClr val="tx1"/>
+                </a:solidFill>
+              </a:ln>
+            </p:spPr>
+            <p:style>
+              <a:lnRef idx="2">
+                <a:schemeClr val="accent1">
+                  <a:shade val="50000"/>
+                </a:schemeClr>
+              </a:lnRef>
+              <a:fillRef idx="1">
+                <a:schemeClr val="accent1"/>
+              </a:fillRef>
+              <a:effectRef idx="0">
+                <a:schemeClr val="accent1"/>
+              </a:effectRef>
+              <a:fontRef idx="minor">
+                <a:schemeClr val="lt1"/>
+              </a:fontRef>
+            </p:style>
+            <p:txBody>
+              <a:bodyPr rtlCol="0" anchor="ctr"/>
+              <a:lstStyle/>
+              <a:p>
+                <a:pPr algn="ctr"/>
+                <a:endParaRPr lang="en-US"/>
+              </a:p>
+            </p:txBody>
+          </p:sp>
+          <p:sp>
+            <p:nvSpPr>
+              <p:cNvPr id="15" name="Flowchart: Connector 14">
+                <a:extLst>
+                  <a:ext uri="{FF2B5EF4-FFF2-40B4-BE49-F238E27FC236}">
+                    <a16:creationId xmlns:a16="http://schemas.microsoft.com/office/drawing/2014/main" id="{660616E0-0654-C8E7-DA89-EF9391164056}"/>
+                  </a:ext>
+                </a:extLst>
+              </p:cNvPr>
+              <p:cNvSpPr/>
+              <p:nvPr/>
+            </p:nvSpPr>
+            <p:spPr>
+              <a:xfrm>
+                <a:off x="5891863" y="3474349"/>
+                <a:ext cx="414119" cy="397284"/>
+              </a:xfrm>
+              <a:prstGeom prst="flowChartConnector">
+                <a:avLst/>
+              </a:prstGeom>
+              <a:solidFill>
+                <a:schemeClr val="bg1"/>
+              </a:solidFill>
+              <a:ln>
+                <a:solidFill>
+                  <a:schemeClr val="tx1"/>
+                </a:solidFill>
+              </a:ln>
+            </p:spPr>
+            <p:style>
+              <a:lnRef idx="2">
+                <a:schemeClr val="accent1">
+                  <a:shade val="50000"/>
+                </a:schemeClr>
+              </a:lnRef>
+              <a:fillRef idx="1">
+                <a:schemeClr val="accent1"/>
+              </a:fillRef>
+              <a:effectRef idx="0">
+                <a:schemeClr val="accent1"/>
+              </a:effectRef>
+              <a:fontRef idx="minor">
+                <a:schemeClr val="lt1"/>
+              </a:fontRef>
+            </p:style>
+            <p:txBody>
+              <a:bodyPr rtlCol="0" anchor="ctr"/>
+              <a:lstStyle/>
+              <a:p>
+                <a:pPr algn="ctr"/>
+                <a:endParaRPr lang="en-US"/>
+              </a:p>
+            </p:txBody>
+          </p:sp>
+          <p:sp>
+            <p:nvSpPr>
+              <p:cNvPr id="16" name="Flowchart: Connector 15">
+                <a:extLst>
+                  <a:ext uri="{FF2B5EF4-FFF2-40B4-BE49-F238E27FC236}">
+                    <a16:creationId xmlns:a16="http://schemas.microsoft.com/office/drawing/2014/main" id="{4669001D-CE58-3966-7C1A-C7A3845AD2A6}"/>
+                  </a:ext>
+                </a:extLst>
+              </p:cNvPr>
+              <p:cNvSpPr/>
+              <p:nvPr/>
+            </p:nvSpPr>
+            <p:spPr>
+              <a:xfrm>
+                <a:off x="4215458" y="3946229"/>
+                <a:ext cx="414119" cy="397284"/>
+              </a:xfrm>
+              <a:prstGeom prst="flowChartConnector">
+                <a:avLst/>
+              </a:prstGeom>
+              <a:solidFill>
+                <a:schemeClr val="bg1"/>
+              </a:solidFill>
+              <a:ln>
+                <a:solidFill>
+                  <a:schemeClr val="tx1"/>
+                </a:solidFill>
+              </a:ln>
+            </p:spPr>
+            <p:style>
+              <a:lnRef idx="2">
+                <a:schemeClr val="accent1">
+                  <a:shade val="50000"/>
+                </a:schemeClr>
+              </a:lnRef>
+              <a:fillRef idx="1">
+                <a:schemeClr val="accent1"/>
+              </a:fillRef>
+              <a:effectRef idx="0">
+                <a:schemeClr val="accent1"/>
+              </a:effectRef>
+              <a:fontRef idx="minor">
+                <a:schemeClr val="lt1"/>
+              </a:fontRef>
+            </p:style>
+            <p:txBody>
+              <a:bodyPr rtlCol="0" anchor="ctr"/>
+              <a:lstStyle/>
+              <a:p>
+                <a:pPr algn="ctr"/>
+                <a:endParaRPr lang="en-US"/>
+              </a:p>
+            </p:txBody>
+          </p:sp>
+          <p:sp>
+            <p:nvSpPr>
+              <p:cNvPr id="17" name="Flowchart: Connector 16">
+                <a:extLst>
+                  <a:ext uri="{FF2B5EF4-FFF2-40B4-BE49-F238E27FC236}">
+                    <a16:creationId xmlns:a16="http://schemas.microsoft.com/office/drawing/2014/main" id="{3E16350B-DAA4-3DC9-3BD6-BE6322F1FDF2}"/>
+                  </a:ext>
+                </a:extLst>
+              </p:cNvPr>
+              <p:cNvSpPr/>
+              <p:nvPr/>
+            </p:nvSpPr>
+            <p:spPr>
+              <a:xfrm>
+                <a:off x="4206240" y="3474349"/>
+                <a:ext cx="414119" cy="397284"/>
+              </a:xfrm>
+              <a:prstGeom prst="flowChartConnector">
+                <a:avLst/>
+              </a:prstGeom>
+              <a:solidFill>
+                <a:schemeClr val="bg1"/>
+              </a:solidFill>
+              <a:ln>
+                <a:solidFill>
+                  <a:schemeClr val="tx1"/>
+                </a:solidFill>
+              </a:ln>
+            </p:spPr>
+            <p:style>
+              <a:lnRef idx="2">
+                <a:schemeClr val="accent1">
+                  <a:shade val="50000"/>
+                </a:schemeClr>
+              </a:lnRef>
+              <a:fillRef idx="1">
+                <a:schemeClr val="accent1"/>
+              </a:fillRef>
+              <a:effectRef idx="0">
+                <a:schemeClr val="accent1"/>
+              </a:effectRef>
+              <a:fontRef idx="minor">
+                <a:schemeClr val="lt1"/>
+              </a:fontRef>
+            </p:style>
+            <p:txBody>
+              <a:bodyPr rtlCol="0" anchor="ctr"/>
+              <a:lstStyle/>
+              <a:p>
+                <a:pPr algn="ctr"/>
+                <a:endParaRPr lang="en-US" dirty="0"/>
+              </a:p>
+            </p:txBody>
+          </p:sp>
+          <p:sp>
+            <p:nvSpPr>
+              <p:cNvPr id="18" name="Flowchart: Connector 17">
+                <a:extLst>
+                  <a:ext uri="{FF2B5EF4-FFF2-40B4-BE49-F238E27FC236}">
+                    <a16:creationId xmlns:a16="http://schemas.microsoft.com/office/drawing/2014/main" id="{C8BC0FF4-BD16-480D-1F22-4EB96A336034}"/>
+                  </a:ext>
+                </a:extLst>
+              </p:cNvPr>
+              <p:cNvSpPr/>
+              <p:nvPr/>
+            </p:nvSpPr>
+            <p:spPr>
+              <a:xfrm>
+                <a:off x="6460739" y="3474349"/>
+                <a:ext cx="414119" cy="397284"/>
+              </a:xfrm>
+              <a:prstGeom prst="flowChartConnector">
+                <a:avLst/>
+              </a:prstGeom>
+              <a:solidFill>
+                <a:schemeClr val="bg1"/>
+              </a:solidFill>
+              <a:ln>
+                <a:solidFill>
+                  <a:schemeClr val="tx1"/>
+                </a:solidFill>
+              </a:ln>
+            </p:spPr>
+            <p:style>
+              <a:lnRef idx="2">
+                <a:schemeClr val="accent1">
+                  <a:shade val="50000"/>
+                </a:schemeClr>
+              </a:lnRef>
+              <a:fillRef idx="1">
+                <a:schemeClr val="accent1"/>
+              </a:fillRef>
+              <a:effectRef idx="0">
+                <a:schemeClr val="accent1"/>
+              </a:effectRef>
+              <a:fontRef idx="minor">
+                <a:schemeClr val="lt1"/>
+              </a:fontRef>
+            </p:style>
+            <p:txBody>
+              <a:bodyPr rtlCol="0" anchor="ctr"/>
+              <a:lstStyle/>
+              <a:p>
+                <a:pPr algn="ctr"/>
+                <a:endParaRPr lang="en-US"/>
+              </a:p>
+            </p:txBody>
+          </p:sp>
+          <p:sp>
+            <p:nvSpPr>
+              <p:cNvPr id="19" name="Flowchart: Connector 18">
+                <a:extLst>
+                  <a:ext uri="{FF2B5EF4-FFF2-40B4-BE49-F238E27FC236}">
+                    <a16:creationId xmlns:a16="http://schemas.microsoft.com/office/drawing/2014/main" id="{533B5EBA-3835-1AD2-628A-21B1033F8347}"/>
+                  </a:ext>
+                </a:extLst>
+              </p:cNvPr>
+              <p:cNvSpPr/>
+              <p:nvPr/>
+            </p:nvSpPr>
+            <p:spPr>
+              <a:xfrm>
+                <a:off x="7029615" y="3474349"/>
+                <a:ext cx="414119" cy="397284"/>
+              </a:xfrm>
+              <a:prstGeom prst="flowChartConnector">
+                <a:avLst/>
+              </a:prstGeom>
+              <a:solidFill>
+                <a:schemeClr val="bg1"/>
+              </a:solidFill>
+              <a:ln>
+                <a:solidFill>
+                  <a:schemeClr val="tx1"/>
+                </a:solidFill>
+              </a:ln>
+            </p:spPr>
+            <p:style>
+              <a:lnRef idx="2">
+                <a:schemeClr val="accent1">
+                  <a:shade val="50000"/>
+                </a:schemeClr>
+              </a:lnRef>
+              <a:fillRef idx="1">
+                <a:schemeClr val="accent1"/>
+              </a:fillRef>
+              <a:effectRef idx="0">
+                <a:schemeClr val="accent1"/>
+              </a:effectRef>
+              <a:fontRef idx="minor">
+                <a:schemeClr val="lt1"/>
+              </a:fontRef>
+            </p:style>
+            <p:txBody>
+              <a:bodyPr rtlCol="0" anchor="ctr"/>
+              <a:lstStyle/>
+              <a:p>
+                <a:pPr algn="ctr"/>
+                <a:endParaRPr lang="en-US"/>
+              </a:p>
+            </p:txBody>
+          </p:sp>
+          <p:sp>
+            <p:nvSpPr>
+              <p:cNvPr id="20" name="Flowchart: Connector 19">
+                <a:extLst>
+                  <a:ext uri="{FF2B5EF4-FFF2-40B4-BE49-F238E27FC236}">
+                    <a16:creationId xmlns:a16="http://schemas.microsoft.com/office/drawing/2014/main" id="{EFA21642-0574-F4EF-7331-5CC225ECCA86}"/>
+                  </a:ext>
+                </a:extLst>
+              </p:cNvPr>
+              <p:cNvSpPr/>
+              <p:nvPr/>
+            </p:nvSpPr>
+            <p:spPr>
+              <a:xfrm>
+                <a:off x="7577486" y="3474349"/>
+                <a:ext cx="414119" cy="397284"/>
+              </a:xfrm>
+              <a:prstGeom prst="flowChartConnector">
+                <a:avLst/>
+              </a:prstGeom>
+              <a:solidFill>
+                <a:schemeClr val="bg1"/>
+              </a:solidFill>
+              <a:ln>
+                <a:solidFill>
+                  <a:schemeClr val="tx1"/>
+                </a:solidFill>
+              </a:ln>
+            </p:spPr>
+            <p:style>
+              <a:lnRef idx="2">
+                <a:schemeClr val="accent1">
+                  <a:shade val="50000"/>
+                </a:schemeClr>
+              </a:lnRef>
+              <a:fillRef idx="1">
+                <a:schemeClr val="accent1"/>
+              </a:fillRef>
+              <a:effectRef idx="0">
+                <a:schemeClr val="accent1"/>
+              </a:effectRef>
+              <a:fontRef idx="minor">
+                <a:schemeClr val="lt1"/>
+              </a:fontRef>
+            </p:style>
+            <p:txBody>
+              <a:bodyPr rtlCol="0" anchor="ctr"/>
+              <a:lstStyle/>
+              <a:p>
+                <a:pPr algn="ctr"/>
+                <a:endParaRPr lang="en-US"/>
+              </a:p>
+            </p:txBody>
+          </p:sp>
+          <p:sp>
+            <p:nvSpPr>
+              <p:cNvPr id="21" name="Flowchart: Connector 20">
+                <a:extLst>
+                  <a:ext uri="{FF2B5EF4-FFF2-40B4-BE49-F238E27FC236}">
+                    <a16:creationId xmlns:a16="http://schemas.microsoft.com/office/drawing/2014/main" id="{87113ABC-E592-770D-ED8E-B25EE2D3ED79}"/>
+                  </a:ext>
+                </a:extLst>
+              </p:cNvPr>
+              <p:cNvSpPr/>
+              <p:nvPr/>
+            </p:nvSpPr>
+            <p:spPr>
+              <a:xfrm>
+                <a:off x="7568271" y="3946229"/>
+                <a:ext cx="414119" cy="397284"/>
+              </a:xfrm>
+              <a:prstGeom prst="flowChartConnector">
+                <a:avLst/>
+              </a:prstGeom>
+              <a:solidFill>
+                <a:schemeClr val="bg1"/>
+              </a:solidFill>
+              <a:ln>
+                <a:solidFill>
+                  <a:schemeClr val="tx1"/>
+                </a:solidFill>
+              </a:ln>
+            </p:spPr>
+            <p:style>
+              <a:lnRef idx="2">
+                <a:schemeClr val="accent1">
+                  <a:shade val="50000"/>
+                </a:schemeClr>
+              </a:lnRef>
+              <a:fillRef idx="1">
+                <a:schemeClr val="accent1"/>
+              </a:fillRef>
+              <a:effectRef idx="0">
+                <a:schemeClr val="accent1"/>
+              </a:effectRef>
+              <a:fontRef idx="minor">
+                <a:schemeClr val="lt1"/>
+              </a:fontRef>
+            </p:style>
+            <p:txBody>
+              <a:bodyPr rtlCol="0" anchor="ctr"/>
+              <a:lstStyle/>
+              <a:p>
+                <a:pPr algn="ctr"/>
+                <a:endParaRPr lang="en-US"/>
+              </a:p>
+            </p:txBody>
+          </p:sp>
+          <p:sp>
+            <p:nvSpPr>
+              <p:cNvPr id="69" name="Flowchart: Connector 68">
+                <a:extLst>
+                  <a:ext uri="{FF2B5EF4-FFF2-40B4-BE49-F238E27FC236}">
+                    <a16:creationId xmlns:a16="http://schemas.microsoft.com/office/drawing/2014/main" id="{81818A59-F212-46B9-0372-FFFC6B682EE2}"/>
+                  </a:ext>
+                </a:extLst>
+              </p:cNvPr>
+              <p:cNvSpPr/>
+              <p:nvPr/>
+            </p:nvSpPr>
+            <p:spPr>
+              <a:xfrm>
+                <a:off x="4765901" y="2559836"/>
+                <a:ext cx="414119" cy="397284"/>
+              </a:xfrm>
+              <a:prstGeom prst="flowChartConnector">
+                <a:avLst/>
+              </a:prstGeom>
+              <a:solidFill>
+                <a:schemeClr val="bg1"/>
+              </a:solidFill>
+              <a:ln>
+                <a:solidFill>
+                  <a:schemeClr val="tx1"/>
+                </a:solidFill>
+              </a:ln>
+            </p:spPr>
+            <p:style>
+              <a:lnRef idx="2">
+                <a:schemeClr val="accent1">
+                  <a:shade val="50000"/>
+                </a:schemeClr>
+              </a:lnRef>
+              <a:fillRef idx="1">
+                <a:schemeClr val="accent1"/>
+              </a:fillRef>
+              <a:effectRef idx="0">
+                <a:schemeClr val="accent1"/>
+              </a:effectRef>
+              <a:fontRef idx="minor">
+                <a:schemeClr val="lt1"/>
+              </a:fontRef>
+            </p:style>
+            <p:txBody>
+              <a:bodyPr rtlCol="0" anchor="ctr"/>
+              <a:lstStyle/>
+              <a:p>
+                <a:pPr algn="ctr"/>
+                <a:endParaRPr lang="en-US"/>
+              </a:p>
+            </p:txBody>
+          </p:sp>
+          <p:sp>
+            <p:nvSpPr>
+              <p:cNvPr id="70" name="Flowchart: Connector 69">
+                <a:extLst>
+                  <a:ext uri="{FF2B5EF4-FFF2-40B4-BE49-F238E27FC236}">
+                    <a16:creationId xmlns:a16="http://schemas.microsoft.com/office/drawing/2014/main" id="{D614A4E8-658E-32F3-56AF-49C1B2CE3C49}"/>
+                  </a:ext>
+                </a:extLst>
+              </p:cNvPr>
+              <p:cNvSpPr/>
+              <p:nvPr/>
+            </p:nvSpPr>
+            <p:spPr>
+              <a:xfrm>
+                <a:off x="4770510" y="3031715"/>
+                <a:ext cx="414119" cy="397284"/>
+              </a:xfrm>
+              <a:prstGeom prst="flowChartConnector">
+                <a:avLst/>
+              </a:prstGeom>
+              <a:solidFill>
+                <a:schemeClr val="bg1"/>
+              </a:solidFill>
+              <a:ln>
+                <a:solidFill>
+                  <a:schemeClr val="tx1"/>
+                </a:solidFill>
+              </a:ln>
+            </p:spPr>
+            <p:style>
+              <a:lnRef idx="2">
+                <a:schemeClr val="accent1">
+                  <a:shade val="50000"/>
+                </a:schemeClr>
+              </a:lnRef>
+              <a:fillRef idx="1">
+                <a:schemeClr val="accent1"/>
+              </a:fillRef>
+              <a:effectRef idx="0">
+                <a:schemeClr val="accent1"/>
+              </a:effectRef>
+              <a:fontRef idx="minor">
+                <a:schemeClr val="lt1"/>
+              </a:fontRef>
+            </p:style>
+            <p:txBody>
+              <a:bodyPr rtlCol="0" anchor="ctr"/>
+              <a:lstStyle/>
+              <a:p>
+                <a:pPr algn="ctr"/>
+                <a:endParaRPr lang="en-US"/>
+              </a:p>
+            </p:txBody>
+          </p:sp>
+          <p:sp>
+            <p:nvSpPr>
+              <p:cNvPr id="71" name="Flowchart: Connector 70">
+                <a:extLst>
+                  <a:ext uri="{FF2B5EF4-FFF2-40B4-BE49-F238E27FC236}">
+                    <a16:creationId xmlns:a16="http://schemas.microsoft.com/office/drawing/2014/main" id="{9A3F726C-340C-744E-B0B7-13FEC46ED44A}"/>
+                  </a:ext>
+                </a:extLst>
+              </p:cNvPr>
+              <p:cNvSpPr/>
+              <p:nvPr/>
+            </p:nvSpPr>
+            <p:spPr>
+              <a:xfrm>
+                <a:off x="5334777" y="3031715"/>
+                <a:ext cx="414119" cy="397284"/>
+              </a:xfrm>
+              <a:prstGeom prst="flowChartConnector">
+                <a:avLst/>
+              </a:prstGeom>
+              <a:solidFill>
+                <a:schemeClr val="bg1"/>
+              </a:solidFill>
+              <a:ln>
+                <a:solidFill>
+                  <a:schemeClr val="tx1"/>
+                </a:solidFill>
+              </a:ln>
+            </p:spPr>
+            <p:style>
+              <a:lnRef idx="2">
+                <a:schemeClr val="accent1">
+                  <a:shade val="50000"/>
+                </a:schemeClr>
+              </a:lnRef>
+              <a:fillRef idx="1">
+                <a:schemeClr val="accent1"/>
+              </a:fillRef>
+              <a:effectRef idx="0">
+                <a:schemeClr val="accent1"/>
+              </a:effectRef>
+              <a:fontRef idx="minor">
+                <a:schemeClr val="lt1"/>
+              </a:fontRef>
+            </p:style>
+            <p:txBody>
+              <a:bodyPr rtlCol="0" anchor="ctr"/>
+              <a:lstStyle/>
+              <a:p>
+                <a:pPr algn="ctr"/>
+                <a:endParaRPr lang="en-US"/>
+              </a:p>
+            </p:txBody>
+          </p:sp>
+          <p:sp>
+            <p:nvSpPr>
+              <p:cNvPr id="72" name="Flowchart: Connector 71">
+                <a:extLst>
+                  <a:ext uri="{FF2B5EF4-FFF2-40B4-BE49-F238E27FC236}">
+                    <a16:creationId xmlns:a16="http://schemas.microsoft.com/office/drawing/2014/main" id="{297032EE-8B7E-753C-5CA6-31615B786432}"/>
+                  </a:ext>
+                </a:extLst>
+              </p:cNvPr>
+              <p:cNvSpPr/>
+              <p:nvPr/>
+            </p:nvSpPr>
+            <p:spPr>
+              <a:xfrm>
+                <a:off x="5899044" y="3031716"/>
+                <a:ext cx="414119" cy="397284"/>
+              </a:xfrm>
+              <a:prstGeom prst="flowChartConnector">
+                <a:avLst/>
+              </a:prstGeom>
+              <a:solidFill>
+                <a:schemeClr val="bg1"/>
+              </a:solidFill>
+              <a:ln>
+                <a:solidFill>
+                  <a:schemeClr val="tx1"/>
+                </a:solidFill>
+              </a:ln>
+            </p:spPr>
+            <p:style>
+              <a:lnRef idx="2">
+                <a:schemeClr val="accent1">
+                  <a:shade val="50000"/>
+                </a:schemeClr>
+              </a:lnRef>
+              <a:fillRef idx="1">
+                <a:schemeClr val="accent1"/>
+              </a:fillRef>
+              <a:effectRef idx="0">
+                <a:schemeClr val="accent1"/>
+              </a:effectRef>
+              <a:fontRef idx="minor">
+                <a:schemeClr val="lt1"/>
+              </a:fontRef>
+            </p:style>
+            <p:txBody>
+              <a:bodyPr rtlCol="0" anchor="ctr"/>
+              <a:lstStyle/>
+              <a:p>
+                <a:pPr algn="ctr"/>
+                <a:endParaRPr lang="en-US"/>
+              </a:p>
+            </p:txBody>
+          </p:sp>
+          <p:sp>
+            <p:nvSpPr>
+              <p:cNvPr id="73" name="Flowchart: Connector 72">
+                <a:extLst>
+                  <a:ext uri="{FF2B5EF4-FFF2-40B4-BE49-F238E27FC236}">
+                    <a16:creationId xmlns:a16="http://schemas.microsoft.com/office/drawing/2014/main" id="{CC4919DF-3E69-0625-6131-D9E0011062BB}"/>
+                  </a:ext>
+                </a:extLst>
+              </p:cNvPr>
+              <p:cNvSpPr/>
+              <p:nvPr/>
+            </p:nvSpPr>
+            <p:spPr>
+              <a:xfrm>
+                <a:off x="6463311" y="3031715"/>
+                <a:ext cx="414119" cy="397284"/>
+              </a:xfrm>
+              <a:prstGeom prst="flowChartConnector">
+                <a:avLst/>
+              </a:prstGeom>
+              <a:solidFill>
+                <a:schemeClr val="bg1"/>
+              </a:solidFill>
+              <a:ln>
+                <a:solidFill>
+                  <a:schemeClr val="tx1"/>
+                </a:solidFill>
+              </a:ln>
+            </p:spPr>
+            <p:style>
+              <a:lnRef idx="2">
+                <a:schemeClr val="accent1">
+                  <a:shade val="50000"/>
+                </a:schemeClr>
+              </a:lnRef>
+              <a:fillRef idx="1">
+                <a:schemeClr val="accent1"/>
+              </a:fillRef>
+              <a:effectRef idx="0">
+                <a:schemeClr val="accent1"/>
+              </a:effectRef>
+              <a:fontRef idx="minor">
+                <a:schemeClr val="lt1"/>
+              </a:fontRef>
+            </p:style>
+            <p:txBody>
+              <a:bodyPr rtlCol="0" anchor="ctr"/>
+              <a:lstStyle/>
+              <a:p>
+                <a:pPr algn="ctr"/>
+                <a:endParaRPr lang="en-US"/>
+              </a:p>
+            </p:txBody>
+          </p:sp>
+          <p:sp>
+            <p:nvSpPr>
+              <p:cNvPr id="74" name="Flowchart: Connector 73">
+                <a:extLst>
+                  <a:ext uri="{FF2B5EF4-FFF2-40B4-BE49-F238E27FC236}">
+                    <a16:creationId xmlns:a16="http://schemas.microsoft.com/office/drawing/2014/main" id="{E818BC44-7D5F-A47A-A33C-7F13FD868E70}"/>
+                  </a:ext>
+                </a:extLst>
+              </p:cNvPr>
+              <p:cNvSpPr/>
+              <p:nvPr/>
+            </p:nvSpPr>
+            <p:spPr>
+              <a:xfrm>
+                <a:off x="7011434" y="3031715"/>
+                <a:ext cx="414119" cy="397284"/>
+              </a:xfrm>
+              <a:prstGeom prst="flowChartConnector">
+                <a:avLst/>
+              </a:prstGeom>
+              <a:solidFill>
+                <a:schemeClr val="bg1"/>
+              </a:solidFill>
+              <a:ln>
+                <a:solidFill>
+                  <a:schemeClr val="tx1"/>
+                </a:solidFill>
+              </a:ln>
+            </p:spPr>
+            <p:style>
+              <a:lnRef idx="2">
+                <a:schemeClr val="accent1">
+                  <a:shade val="50000"/>
+                </a:schemeClr>
+              </a:lnRef>
+              <a:fillRef idx="1">
+                <a:schemeClr val="accent1"/>
+              </a:fillRef>
+              <a:effectRef idx="0">
+                <a:schemeClr val="accent1"/>
+              </a:effectRef>
+              <a:fontRef idx="minor">
+                <a:schemeClr val="lt1"/>
+              </a:fontRef>
+            </p:style>
+            <p:txBody>
+              <a:bodyPr rtlCol="0" anchor="ctr"/>
+              <a:lstStyle/>
+              <a:p>
+                <a:pPr algn="ctr"/>
+                <a:endParaRPr lang="en-US"/>
+              </a:p>
+            </p:txBody>
+          </p:sp>
+          <p:sp>
+            <p:nvSpPr>
+              <p:cNvPr id="75" name="Flowchart: Connector 74">
+                <a:extLst>
+                  <a:ext uri="{FF2B5EF4-FFF2-40B4-BE49-F238E27FC236}">
+                    <a16:creationId xmlns:a16="http://schemas.microsoft.com/office/drawing/2014/main" id="{65DBE393-561D-7C66-D4D2-8ABE08A897BE}"/>
+                  </a:ext>
+                </a:extLst>
+              </p:cNvPr>
+              <p:cNvSpPr/>
+              <p:nvPr/>
+            </p:nvSpPr>
+            <p:spPr>
+              <a:xfrm>
+                <a:off x="5334777" y="2559836"/>
+                <a:ext cx="414119" cy="397284"/>
+              </a:xfrm>
+              <a:prstGeom prst="flowChartConnector">
+                <a:avLst/>
+              </a:prstGeom>
+              <a:solidFill>
+                <a:schemeClr val="bg1"/>
+              </a:solidFill>
+              <a:ln>
+                <a:solidFill>
+                  <a:schemeClr val="tx1"/>
+                </a:solidFill>
+              </a:ln>
+            </p:spPr>
+            <p:style>
+              <a:lnRef idx="2">
+                <a:schemeClr val="accent1">
+                  <a:shade val="50000"/>
+                </a:schemeClr>
+              </a:lnRef>
+              <a:fillRef idx="1">
+                <a:schemeClr val="accent1"/>
+              </a:fillRef>
+              <a:effectRef idx="0">
+                <a:schemeClr val="accent1"/>
+              </a:effectRef>
+              <a:fontRef idx="minor">
+                <a:schemeClr val="lt1"/>
+              </a:fontRef>
+            </p:style>
+            <p:txBody>
+              <a:bodyPr rtlCol="0" anchor="ctr"/>
+              <a:lstStyle/>
+              <a:p>
+                <a:pPr algn="ctr"/>
+                <a:endParaRPr lang="en-US"/>
+              </a:p>
+            </p:txBody>
+          </p:sp>
+          <p:sp>
+            <p:nvSpPr>
+              <p:cNvPr id="76" name="Flowchart: Connector 75">
+                <a:extLst>
+                  <a:ext uri="{FF2B5EF4-FFF2-40B4-BE49-F238E27FC236}">
+                    <a16:creationId xmlns:a16="http://schemas.microsoft.com/office/drawing/2014/main" id="{7B6B3964-3640-521C-6927-9A4B856BF9AF}"/>
+                  </a:ext>
+                </a:extLst>
+              </p:cNvPr>
+              <p:cNvSpPr/>
+              <p:nvPr/>
+            </p:nvSpPr>
+            <p:spPr>
+              <a:xfrm>
+                <a:off x="5882648" y="2559835"/>
+                <a:ext cx="414119" cy="397284"/>
+              </a:xfrm>
+              <a:prstGeom prst="flowChartConnector">
+                <a:avLst/>
+              </a:prstGeom>
+              <a:solidFill>
+                <a:schemeClr val="bg1"/>
+              </a:solidFill>
+              <a:ln>
+                <a:solidFill>
+                  <a:schemeClr val="tx1"/>
+                </a:solidFill>
+              </a:ln>
+            </p:spPr>
+            <p:style>
+              <a:lnRef idx="2">
+                <a:schemeClr val="accent1">
+                  <a:shade val="50000"/>
+                </a:schemeClr>
+              </a:lnRef>
+              <a:fillRef idx="1">
+                <a:schemeClr val="accent1"/>
+              </a:fillRef>
+              <a:effectRef idx="0">
+                <a:schemeClr val="accent1"/>
+              </a:effectRef>
+              <a:fontRef idx="minor">
+                <a:schemeClr val="lt1"/>
+              </a:fontRef>
+            </p:style>
+            <p:txBody>
+              <a:bodyPr rtlCol="0" anchor="ctr"/>
+              <a:lstStyle/>
+              <a:p>
+                <a:pPr algn="ctr"/>
+                <a:endParaRPr lang="en-US"/>
+              </a:p>
+            </p:txBody>
+          </p:sp>
+          <p:sp>
+            <p:nvSpPr>
+              <p:cNvPr id="77" name="Flowchart: Connector 76">
+                <a:extLst>
+                  <a:ext uri="{FF2B5EF4-FFF2-40B4-BE49-F238E27FC236}">
+                    <a16:creationId xmlns:a16="http://schemas.microsoft.com/office/drawing/2014/main" id="{1F7AD953-64D3-693F-121B-1A75BE8A44A6}"/>
+                  </a:ext>
+                </a:extLst>
+              </p:cNvPr>
+              <p:cNvSpPr/>
+              <p:nvPr/>
+            </p:nvSpPr>
+            <p:spPr>
+              <a:xfrm>
+                <a:off x="4206243" y="3031715"/>
+                <a:ext cx="414119" cy="397284"/>
+              </a:xfrm>
+              <a:prstGeom prst="flowChartConnector">
+                <a:avLst/>
+              </a:prstGeom>
+              <a:solidFill>
+                <a:schemeClr val="bg1"/>
+              </a:solidFill>
+              <a:ln>
+                <a:solidFill>
+                  <a:schemeClr val="tx1"/>
+                </a:solidFill>
+              </a:ln>
+            </p:spPr>
+            <p:style>
+              <a:lnRef idx="2">
+                <a:schemeClr val="accent1">
+                  <a:shade val="50000"/>
+                </a:schemeClr>
+              </a:lnRef>
+              <a:fillRef idx="1">
+                <a:schemeClr val="accent1"/>
+              </a:fillRef>
+              <a:effectRef idx="0">
+                <a:schemeClr val="accent1"/>
+              </a:effectRef>
+              <a:fontRef idx="minor">
+                <a:schemeClr val="lt1"/>
+              </a:fontRef>
+            </p:style>
+            <p:txBody>
+              <a:bodyPr rtlCol="0" anchor="ctr"/>
+              <a:lstStyle/>
+              <a:p>
+                <a:pPr algn="ctr"/>
+                <a:endParaRPr lang="en-US"/>
+              </a:p>
+            </p:txBody>
+          </p:sp>
+          <p:sp>
+            <p:nvSpPr>
+              <p:cNvPr id="78" name="Flowchart: Connector 77">
+                <a:extLst>
+                  <a:ext uri="{FF2B5EF4-FFF2-40B4-BE49-F238E27FC236}">
+                    <a16:creationId xmlns:a16="http://schemas.microsoft.com/office/drawing/2014/main" id="{B608C5AE-4A6D-1B7E-541E-457D8887D94C}"/>
+                  </a:ext>
+                </a:extLst>
+              </p:cNvPr>
+              <p:cNvSpPr/>
+              <p:nvPr/>
+            </p:nvSpPr>
+            <p:spPr>
+              <a:xfrm>
+                <a:off x="4197025" y="2559835"/>
+                <a:ext cx="414119" cy="397284"/>
+              </a:xfrm>
+              <a:prstGeom prst="flowChartConnector">
+                <a:avLst/>
+              </a:prstGeom>
+              <a:solidFill>
+                <a:schemeClr val="bg1"/>
+              </a:solidFill>
+              <a:ln>
+                <a:solidFill>
+                  <a:schemeClr val="tx1"/>
+                </a:solidFill>
+              </a:ln>
+            </p:spPr>
+            <p:style>
+              <a:lnRef idx="2">
+                <a:schemeClr val="accent1">
+                  <a:shade val="50000"/>
+                </a:schemeClr>
+              </a:lnRef>
+              <a:fillRef idx="1">
+                <a:schemeClr val="accent1"/>
+              </a:fillRef>
+              <a:effectRef idx="0">
+                <a:schemeClr val="accent1"/>
+              </a:effectRef>
+              <a:fontRef idx="minor">
+                <a:schemeClr val="lt1"/>
+              </a:fontRef>
+            </p:style>
+            <p:txBody>
+              <a:bodyPr rtlCol="0" anchor="ctr"/>
+              <a:lstStyle/>
+              <a:p>
+                <a:pPr algn="ctr"/>
+                <a:endParaRPr lang="en-US" dirty="0"/>
+              </a:p>
+            </p:txBody>
+          </p:sp>
+          <p:sp>
+            <p:nvSpPr>
+              <p:cNvPr id="79" name="Flowchart: Connector 78">
+                <a:extLst>
+                  <a:ext uri="{FF2B5EF4-FFF2-40B4-BE49-F238E27FC236}">
+                    <a16:creationId xmlns:a16="http://schemas.microsoft.com/office/drawing/2014/main" id="{ED0DEC2A-5A60-BC64-740D-6E7AF1B0B888}"/>
+                  </a:ext>
+                </a:extLst>
+              </p:cNvPr>
+              <p:cNvSpPr/>
+              <p:nvPr/>
+            </p:nvSpPr>
+            <p:spPr>
+              <a:xfrm>
+                <a:off x="6451524" y="2559835"/>
+                <a:ext cx="414119" cy="397284"/>
+              </a:xfrm>
+              <a:prstGeom prst="flowChartConnector">
+                <a:avLst/>
+              </a:prstGeom>
+              <a:solidFill>
+                <a:schemeClr val="bg1"/>
+              </a:solidFill>
+              <a:ln>
+                <a:solidFill>
+                  <a:schemeClr val="tx1"/>
+                </a:solidFill>
+              </a:ln>
+            </p:spPr>
+            <p:style>
+              <a:lnRef idx="2">
+                <a:schemeClr val="accent1">
+                  <a:shade val="50000"/>
+                </a:schemeClr>
+              </a:lnRef>
+              <a:fillRef idx="1">
+                <a:schemeClr val="accent1"/>
+              </a:fillRef>
+              <a:effectRef idx="0">
+                <a:schemeClr val="accent1"/>
+              </a:effectRef>
+              <a:fontRef idx="minor">
+                <a:schemeClr val="lt1"/>
+              </a:fontRef>
+            </p:style>
+            <p:txBody>
+              <a:bodyPr rtlCol="0" anchor="ctr"/>
+              <a:lstStyle/>
+              <a:p>
+                <a:pPr algn="ctr"/>
+                <a:endParaRPr lang="en-US"/>
+              </a:p>
+            </p:txBody>
+          </p:sp>
+          <p:sp>
+            <p:nvSpPr>
+              <p:cNvPr id="80" name="Flowchart: Connector 79">
+                <a:extLst>
+                  <a:ext uri="{FF2B5EF4-FFF2-40B4-BE49-F238E27FC236}">
+                    <a16:creationId xmlns:a16="http://schemas.microsoft.com/office/drawing/2014/main" id="{8AA7D0A7-6F55-39F4-AD34-647398E7A09E}"/>
+                  </a:ext>
+                </a:extLst>
+              </p:cNvPr>
+              <p:cNvSpPr/>
+              <p:nvPr/>
+            </p:nvSpPr>
+            <p:spPr>
+              <a:xfrm>
+                <a:off x="7020400" y="2559835"/>
+                <a:ext cx="414119" cy="397284"/>
+              </a:xfrm>
+              <a:prstGeom prst="flowChartConnector">
+                <a:avLst/>
+              </a:prstGeom>
+              <a:solidFill>
+                <a:schemeClr val="bg1"/>
+              </a:solidFill>
+              <a:ln>
+                <a:solidFill>
+                  <a:schemeClr val="tx1"/>
+                </a:solidFill>
+              </a:ln>
+            </p:spPr>
+            <p:style>
+              <a:lnRef idx="2">
+                <a:schemeClr val="accent1">
+                  <a:shade val="50000"/>
+                </a:schemeClr>
+              </a:lnRef>
+              <a:fillRef idx="1">
+                <a:schemeClr val="accent1"/>
+              </a:fillRef>
+              <a:effectRef idx="0">
+                <a:schemeClr val="accent1"/>
+              </a:effectRef>
+              <a:fontRef idx="minor">
+                <a:schemeClr val="lt1"/>
+              </a:fontRef>
+            </p:style>
+            <p:txBody>
+              <a:bodyPr rtlCol="0" anchor="ctr"/>
+              <a:lstStyle/>
+              <a:p>
+                <a:pPr algn="ctr"/>
+                <a:endParaRPr lang="en-US"/>
+              </a:p>
+            </p:txBody>
+          </p:sp>
+          <p:sp>
+            <p:nvSpPr>
+              <p:cNvPr id="81" name="Flowchart: Connector 80">
+                <a:extLst>
+                  <a:ext uri="{FF2B5EF4-FFF2-40B4-BE49-F238E27FC236}">
+                    <a16:creationId xmlns:a16="http://schemas.microsoft.com/office/drawing/2014/main" id="{27F36636-9072-5A5F-CA84-6046B863500C}"/>
+                  </a:ext>
+                </a:extLst>
+              </p:cNvPr>
+              <p:cNvSpPr/>
+              <p:nvPr/>
+            </p:nvSpPr>
+            <p:spPr>
+              <a:xfrm>
+                <a:off x="7568271" y="2559835"/>
+                <a:ext cx="414119" cy="397284"/>
+              </a:xfrm>
+              <a:prstGeom prst="flowChartConnector">
+                <a:avLst/>
+              </a:prstGeom>
+              <a:solidFill>
+                <a:schemeClr val="bg1"/>
+              </a:solidFill>
+              <a:ln>
+                <a:solidFill>
+                  <a:schemeClr val="tx1"/>
+                </a:solidFill>
+              </a:ln>
+            </p:spPr>
+            <p:style>
+              <a:lnRef idx="2">
+                <a:schemeClr val="accent1">
+                  <a:shade val="50000"/>
+                </a:schemeClr>
+              </a:lnRef>
+              <a:fillRef idx="1">
+                <a:schemeClr val="accent1"/>
+              </a:fillRef>
+              <a:effectRef idx="0">
+                <a:schemeClr val="accent1"/>
+              </a:effectRef>
+              <a:fontRef idx="minor">
+                <a:schemeClr val="lt1"/>
+              </a:fontRef>
+            </p:style>
+            <p:txBody>
+              <a:bodyPr rtlCol="0" anchor="ctr"/>
+              <a:lstStyle/>
+              <a:p>
+                <a:pPr algn="ctr"/>
+                <a:endParaRPr lang="en-US"/>
+              </a:p>
+            </p:txBody>
+          </p:sp>
+          <p:sp>
+            <p:nvSpPr>
+              <p:cNvPr id="82" name="Flowchart: Connector 81">
+                <a:extLst>
+                  <a:ext uri="{FF2B5EF4-FFF2-40B4-BE49-F238E27FC236}">
+                    <a16:creationId xmlns:a16="http://schemas.microsoft.com/office/drawing/2014/main" id="{5E2D515D-9034-115E-007B-83AA7D326E7B}"/>
+                  </a:ext>
+                </a:extLst>
+              </p:cNvPr>
+              <p:cNvSpPr/>
+              <p:nvPr/>
+            </p:nvSpPr>
+            <p:spPr>
+              <a:xfrm>
+                <a:off x="7559056" y="3031715"/>
+                <a:ext cx="414119" cy="397284"/>
+              </a:xfrm>
+              <a:prstGeom prst="flowChartConnector">
+                <a:avLst/>
+              </a:prstGeom>
+              <a:solidFill>
+                <a:schemeClr val="bg1"/>
+              </a:solidFill>
+              <a:ln>
+                <a:solidFill>
+                  <a:schemeClr val="tx1"/>
+                </a:solidFill>
+              </a:ln>
+            </p:spPr>
+            <p:style>
+              <a:lnRef idx="2">
+                <a:schemeClr val="accent1">
+                  <a:shade val="50000"/>
+                </a:schemeClr>
+              </a:lnRef>
+              <a:fillRef idx="1">
+                <a:schemeClr val="accent1"/>
+              </a:fillRef>
+              <a:effectRef idx="0">
+                <a:schemeClr val="accent1"/>
+              </a:effectRef>
+              <a:fontRef idx="minor">
+                <a:schemeClr val="lt1"/>
+              </a:fontRef>
+            </p:style>
+            <p:txBody>
+              <a:bodyPr rtlCol="0" anchor="ctr"/>
+              <a:lstStyle/>
+              <a:p>
+                <a:pPr algn="ctr"/>
+                <a:endParaRPr lang="en-US"/>
+              </a:p>
+            </p:txBody>
+          </p:sp>
+          <p:sp>
+            <p:nvSpPr>
+              <p:cNvPr id="83" name="Flowchart: Connector 82">
+                <a:extLst>
+                  <a:ext uri="{FF2B5EF4-FFF2-40B4-BE49-F238E27FC236}">
+                    <a16:creationId xmlns:a16="http://schemas.microsoft.com/office/drawing/2014/main" id="{F397157C-6D13-4158-DE66-D8833220C657}"/>
+                  </a:ext>
+                </a:extLst>
+              </p:cNvPr>
+              <p:cNvSpPr/>
+              <p:nvPr/>
+            </p:nvSpPr>
+            <p:spPr>
+              <a:xfrm>
+                <a:off x="4756686" y="1616074"/>
+                <a:ext cx="414119" cy="397284"/>
+              </a:xfrm>
+              <a:prstGeom prst="flowChartConnector">
+                <a:avLst/>
+              </a:prstGeom>
+              <a:solidFill>
+                <a:schemeClr val="bg1"/>
+              </a:solidFill>
+              <a:ln>
+                <a:solidFill>
+                  <a:schemeClr val="tx1"/>
+                </a:solidFill>
+              </a:ln>
+            </p:spPr>
+            <p:style>
+              <a:lnRef idx="2">
+                <a:schemeClr val="accent1">
+                  <a:shade val="50000"/>
+                </a:schemeClr>
+              </a:lnRef>
+              <a:fillRef idx="1">
+                <a:schemeClr val="accent1"/>
+              </a:fillRef>
+              <a:effectRef idx="0">
+                <a:schemeClr val="accent1"/>
+              </a:effectRef>
+              <a:fontRef idx="minor">
+                <a:schemeClr val="lt1"/>
+              </a:fontRef>
+            </p:style>
+            <p:txBody>
+              <a:bodyPr rtlCol="0" anchor="ctr"/>
+              <a:lstStyle/>
+              <a:p>
+                <a:pPr algn="ctr"/>
+                <a:endParaRPr lang="en-US"/>
+              </a:p>
+            </p:txBody>
+          </p:sp>
+          <p:sp>
+            <p:nvSpPr>
+              <p:cNvPr id="84" name="Flowchart: Connector 83">
+                <a:extLst>
+                  <a:ext uri="{FF2B5EF4-FFF2-40B4-BE49-F238E27FC236}">
+                    <a16:creationId xmlns:a16="http://schemas.microsoft.com/office/drawing/2014/main" id="{8CF0CE90-2847-08AE-A6C7-28009449D85A}"/>
+                  </a:ext>
+                </a:extLst>
+              </p:cNvPr>
+              <p:cNvSpPr/>
+              <p:nvPr/>
+            </p:nvSpPr>
+            <p:spPr>
+              <a:xfrm>
+                <a:off x="4761295" y="2087953"/>
+                <a:ext cx="414119" cy="397284"/>
+              </a:xfrm>
+              <a:prstGeom prst="flowChartConnector">
+                <a:avLst/>
+              </a:prstGeom>
+              <a:solidFill>
+                <a:schemeClr val="bg1"/>
+              </a:solidFill>
+              <a:ln>
+                <a:solidFill>
+                  <a:schemeClr val="tx1"/>
+                </a:solidFill>
+              </a:ln>
+            </p:spPr>
+            <p:style>
+              <a:lnRef idx="2">
+                <a:schemeClr val="accent1">
+                  <a:shade val="50000"/>
+                </a:schemeClr>
+              </a:lnRef>
+              <a:fillRef idx="1">
+                <a:schemeClr val="accent1"/>
+              </a:fillRef>
+              <a:effectRef idx="0">
+                <a:schemeClr val="accent1"/>
+              </a:effectRef>
+              <a:fontRef idx="minor">
+                <a:schemeClr val="lt1"/>
+              </a:fontRef>
+            </p:style>
+            <p:txBody>
+              <a:bodyPr rtlCol="0" anchor="ctr"/>
+              <a:lstStyle/>
+              <a:p>
+                <a:pPr algn="ctr"/>
+                <a:endParaRPr lang="en-US"/>
+              </a:p>
+            </p:txBody>
+          </p:sp>
+          <p:sp>
+            <p:nvSpPr>
+              <p:cNvPr id="85" name="Flowchart: Connector 84">
+                <a:extLst>
+                  <a:ext uri="{FF2B5EF4-FFF2-40B4-BE49-F238E27FC236}">
+                    <a16:creationId xmlns:a16="http://schemas.microsoft.com/office/drawing/2014/main" id="{35E1CB15-F7CE-5AB0-046C-F73FEA8307C8}"/>
+                  </a:ext>
+                </a:extLst>
+              </p:cNvPr>
+              <p:cNvSpPr/>
+              <p:nvPr/>
+            </p:nvSpPr>
+            <p:spPr>
+              <a:xfrm>
+                <a:off x="5325562" y="2087953"/>
+                <a:ext cx="414119" cy="397284"/>
+              </a:xfrm>
+              <a:prstGeom prst="flowChartConnector">
+                <a:avLst/>
+              </a:prstGeom>
+              <a:solidFill>
+                <a:schemeClr val="bg1"/>
+              </a:solidFill>
+              <a:ln>
+                <a:solidFill>
+                  <a:schemeClr val="tx1"/>
+                </a:solidFill>
+              </a:ln>
+            </p:spPr>
+            <p:style>
+              <a:lnRef idx="2">
+                <a:schemeClr val="accent1">
+                  <a:shade val="50000"/>
+                </a:schemeClr>
+              </a:lnRef>
+              <a:fillRef idx="1">
+                <a:schemeClr val="accent1"/>
+              </a:fillRef>
+              <a:effectRef idx="0">
+                <a:schemeClr val="accent1"/>
+              </a:effectRef>
+              <a:fontRef idx="minor">
+                <a:schemeClr val="lt1"/>
+              </a:fontRef>
+            </p:style>
+            <p:txBody>
+              <a:bodyPr rtlCol="0" anchor="ctr"/>
+              <a:lstStyle/>
+              <a:p>
+                <a:pPr algn="ctr"/>
+                <a:endParaRPr lang="en-US"/>
+              </a:p>
+            </p:txBody>
+          </p:sp>
+          <p:sp>
+            <p:nvSpPr>
+              <p:cNvPr id="86" name="Flowchart: Connector 85">
+                <a:extLst>
+                  <a:ext uri="{FF2B5EF4-FFF2-40B4-BE49-F238E27FC236}">
+                    <a16:creationId xmlns:a16="http://schemas.microsoft.com/office/drawing/2014/main" id="{3B7A3467-23C7-D163-EA62-E373AFC87FA7}"/>
+                  </a:ext>
+                </a:extLst>
+              </p:cNvPr>
+              <p:cNvSpPr/>
+              <p:nvPr/>
+            </p:nvSpPr>
+            <p:spPr>
+              <a:xfrm>
+                <a:off x="5889829" y="2087954"/>
+                <a:ext cx="414119" cy="397284"/>
+              </a:xfrm>
+              <a:prstGeom prst="flowChartConnector">
+                <a:avLst/>
+              </a:prstGeom>
+              <a:solidFill>
+                <a:schemeClr val="bg1"/>
+              </a:solidFill>
+              <a:ln>
+                <a:solidFill>
+                  <a:schemeClr val="tx1"/>
+                </a:solidFill>
+              </a:ln>
+            </p:spPr>
+            <p:style>
+              <a:lnRef idx="2">
+                <a:schemeClr val="accent1">
+                  <a:shade val="50000"/>
+                </a:schemeClr>
+              </a:lnRef>
+              <a:fillRef idx="1">
+                <a:schemeClr val="accent1"/>
+              </a:fillRef>
+              <a:effectRef idx="0">
+                <a:schemeClr val="accent1"/>
+              </a:effectRef>
+              <a:fontRef idx="minor">
+                <a:schemeClr val="lt1"/>
+              </a:fontRef>
+            </p:style>
+            <p:txBody>
+              <a:bodyPr rtlCol="0" anchor="ctr"/>
+              <a:lstStyle/>
+              <a:p>
+                <a:pPr algn="ctr"/>
+                <a:endParaRPr lang="en-US"/>
+              </a:p>
+            </p:txBody>
+          </p:sp>
+          <p:sp>
+            <p:nvSpPr>
+              <p:cNvPr id="87" name="Flowchart: Connector 86">
+                <a:extLst>
+                  <a:ext uri="{FF2B5EF4-FFF2-40B4-BE49-F238E27FC236}">
+                    <a16:creationId xmlns:a16="http://schemas.microsoft.com/office/drawing/2014/main" id="{48B6B0C0-52EE-98D6-4D98-502197AD617A}"/>
+                  </a:ext>
+                </a:extLst>
+              </p:cNvPr>
+              <p:cNvSpPr/>
+              <p:nvPr/>
+            </p:nvSpPr>
+            <p:spPr>
+              <a:xfrm>
+                <a:off x="6454096" y="2087953"/>
+                <a:ext cx="414119" cy="397284"/>
+              </a:xfrm>
+              <a:prstGeom prst="flowChartConnector">
+                <a:avLst/>
+              </a:prstGeom>
+              <a:solidFill>
+                <a:schemeClr val="bg1"/>
+              </a:solidFill>
+              <a:ln>
+                <a:solidFill>
+                  <a:schemeClr val="tx1"/>
+                </a:solidFill>
+              </a:ln>
+            </p:spPr>
+            <p:style>
+              <a:lnRef idx="2">
+                <a:schemeClr val="accent1">
+                  <a:shade val="50000"/>
+                </a:schemeClr>
+              </a:lnRef>
+              <a:fillRef idx="1">
+                <a:schemeClr val="accent1"/>
+              </a:fillRef>
+              <a:effectRef idx="0">
+                <a:schemeClr val="accent1"/>
+              </a:effectRef>
+              <a:fontRef idx="minor">
+                <a:schemeClr val="lt1"/>
+              </a:fontRef>
+            </p:style>
+            <p:txBody>
+              <a:bodyPr rtlCol="0" anchor="ctr"/>
+              <a:lstStyle/>
+              <a:p>
+                <a:pPr algn="ctr"/>
+                <a:endParaRPr lang="en-US"/>
+              </a:p>
+            </p:txBody>
+          </p:sp>
+          <p:sp>
+            <p:nvSpPr>
+              <p:cNvPr id="88" name="Flowchart: Connector 87">
+                <a:extLst>
+                  <a:ext uri="{FF2B5EF4-FFF2-40B4-BE49-F238E27FC236}">
+                    <a16:creationId xmlns:a16="http://schemas.microsoft.com/office/drawing/2014/main" id="{789C4474-E98C-C047-C220-801A519A44C6}"/>
+                  </a:ext>
+                </a:extLst>
+              </p:cNvPr>
+              <p:cNvSpPr/>
+              <p:nvPr/>
+            </p:nvSpPr>
+            <p:spPr>
+              <a:xfrm>
+                <a:off x="7002219" y="2087953"/>
+                <a:ext cx="414119" cy="397284"/>
+              </a:xfrm>
+              <a:prstGeom prst="flowChartConnector">
+                <a:avLst/>
+              </a:prstGeom>
+              <a:solidFill>
+                <a:schemeClr val="bg1"/>
+              </a:solidFill>
+              <a:ln>
+                <a:solidFill>
+                  <a:schemeClr val="tx1"/>
+                </a:solidFill>
+              </a:ln>
+            </p:spPr>
+            <p:style>
+              <a:lnRef idx="2">
+                <a:schemeClr val="accent1">
+                  <a:shade val="50000"/>
+                </a:schemeClr>
+              </a:lnRef>
+              <a:fillRef idx="1">
+                <a:schemeClr val="accent1"/>
+              </a:fillRef>
+              <a:effectRef idx="0">
+                <a:schemeClr val="accent1"/>
+              </a:effectRef>
+              <a:fontRef idx="minor">
+                <a:schemeClr val="lt1"/>
+              </a:fontRef>
+            </p:style>
+            <p:txBody>
+              <a:bodyPr rtlCol="0" anchor="ctr"/>
+              <a:lstStyle/>
+              <a:p>
+                <a:pPr algn="ctr"/>
+                <a:endParaRPr lang="en-US"/>
+              </a:p>
+            </p:txBody>
+          </p:sp>
+          <p:sp>
+            <p:nvSpPr>
+              <p:cNvPr id="89" name="Flowchart: Connector 88">
+                <a:extLst>
+                  <a:ext uri="{FF2B5EF4-FFF2-40B4-BE49-F238E27FC236}">
+                    <a16:creationId xmlns:a16="http://schemas.microsoft.com/office/drawing/2014/main" id="{0E58F982-F4EC-33EC-7196-B88FE00E72C4}"/>
+                  </a:ext>
+                </a:extLst>
+              </p:cNvPr>
+              <p:cNvSpPr/>
+              <p:nvPr/>
+            </p:nvSpPr>
+            <p:spPr>
+              <a:xfrm>
+                <a:off x="5325562" y="1616074"/>
+                <a:ext cx="414119" cy="397284"/>
+              </a:xfrm>
+              <a:prstGeom prst="flowChartConnector">
+                <a:avLst/>
+              </a:prstGeom>
+              <a:solidFill>
+                <a:schemeClr val="bg1"/>
+              </a:solidFill>
+              <a:ln>
+                <a:solidFill>
+                  <a:schemeClr val="tx1"/>
+                </a:solidFill>
+              </a:ln>
+            </p:spPr>
+            <p:style>
+              <a:lnRef idx="2">
+                <a:schemeClr val="accent1">
+                  <a:shade val="50000"/>
+                </a:schemeClr>
+              </a:lnRef>
+              <a:fillRef idx="1">
+                <a:schemeClr val="accent1"/>
+              </a:fillRef>
+              <a:effectRef idx="0">
+                <a:schemeClr val="accent1"/>
+              </a:effectRef>
+              <a:fontRef idx="minor">
+                <a:schemeClr val="lt1"/>
+              </a:fontRef>
+            </p:style>
+            <p:txBody>
+              <a:bodyPr rtlCol="0" anchor="ctr"/>
+              <a:lstStyle/>
+              <a:p>
+                <a:pPr algn="ctr"/>
+                <a:endParaRPr lang="en-US"/>
+              </a:p>
+            </p:txBody>
+          </p:sp>
+          <p:sp>
+            <p:nvSpPr>
+              <p:cNvPr id="90" name="Flowchart: Connector 89">
+                <a:extLst>
+                  <a:ext uri="{FF2B5EF4-FFF2-40B4-BE49-F238E27FC236}">
+                    <a16:creationId xmlns:a16="http://schemas.microsoft.com/office/drawing/2014/main" id="{F6B17D1A-7D72-BF5D-33DD-545D0F8A3CA8}"/>
+                  </a:ext>
+                </a:extLst>
+              </p:cNvPr>
+              <p:cNvSpPr/>
+              <p:nvPr/>
+            </p:nvSpPr>
+            <p:spPr>
+              <a:xfrm>
+                <a:off x="5873433" y="1616073"/>
+                <a:ext cx="414119" cy="397284"/>
+              </a:xfrm>
+              <a:prstGeom prst="flowChartConnector">
+                <a:avLst/>
+              </a:prstGeom>
+              <a:solidFill>
+                <a:schemeClr val="bg1"/>
+              </a:solidFill>
+              <a:ln>
+                <a:solidFill>
+                  <a:schemeClr val="tx1"/>
+                </a:solidFill>
+              </a:ln>
+            </p:spPr>
+            <p:style>
+              <a:lnRef idx="2">
+                <a:schemeClr val="accent1">
+                  <a:shade val="50000"/>
+                </a:schemeClr>
+              </a:lnRef>
+              <a:fillRef idx="1">
+                <a:schemeClr val="accent1"/>
+              </a:fillRef>
+              <a:effectRef idx="0">
+                <a:schemeClr val="accent1"/>
+              </a:effectRef>
+              <a:fontRef idx="minor">
+                <a:schemeClr val="lt1"/>
+              </a:fontRef>
+            </p:style>
+            <p:txBody>
+              <a:bodyPr rtlCol="0" anchor="ctr"/>
+              <a:lstStyle/>
+              <a:p>
+                <a:pPr algn="ctr"/>
+                <a:endParaRPr lang="en-US"/>
+              </a:p>
+            </p:txBody>
+          </p:sp>
+          <p:sp>
+            <p:nvSpPr>
+              <p:cNvPr id="91" name="Flowchart: Connector 90">
+                <a:extLst>
+                  <a:ext uri="{FF2B5EF4-FFF2-40B4-BE49-F238E27FC236}">
+                    <a16:creationId xmlns:a16="http://schemas.microsoft.com/office/drawing/2014/main" id="{DBB58490-4C4A-4881-AC9C-6AE1D8C2E3B5}"/>
+                  </a:ext>
+                </a:extLst>
+              </p:cNvPr>
+              <p:cNvSpPr/>
+              <p:nvPr/>
+            </p:nvSpPr>
+            <p:spPr>
+              <a:xfrm>
+                <a:off x="4197028" y="2087953"/>
+                <a:ext cx="414119" cy="397284"/>
+              </a:xfrm>
+              <a:prstGeom prst="flowChartConnector">
+                <a:avLst/>
+              </a:prstGeom>
+              <a:solidFill>
+                <a:schemeClr val="bg1"/>
+              </a:solidFill>
+              <a:ln>
+                <a:solidFill>
+                  <a:schemeClr val="tx1"/>
+                </a:solidFill>
+              </a:ln>
+            </p:spPr>
+            <p:style>
+              <a:lnRef idx="2">
+                <a:schemeClr val="accent1">
+                  <a:shade val="50000"/>
+                </a:schemeClr>
+              </a:lnRef>
+              <a:fillRef idx="1">
+                <a:schemeClr val="accent1"/>
+              </a:fillRef>
+              <a:effectRef idx="0">
+                <a:schemeClr val="accent1"/>
+              </a:effectRef>
+              <a:fontRef idx="minor">
+                <a:schemeClr val="lt1"/>
+              </a:fontRef>
+            </p:style>
+            <p:txBody>
+              <a:bodyPr rtlCol="0" anchor="ctr"/>
+              <a:lstStyle/>
+              <a:p>
+                <a:pPr algn="ctr"/>
+                <a:endParaRPr lang="en-US"/>
+              </a:p>
+            </p:txBody>
+          </p:sp>
+          <p:sp>
+            <p:nvSpPr>
+              <p:cNvPr id="92" name="Flowchart: Connector 91">
+                <a:extLst>
+                  <a:ext uri="{FF2B5EF4-FFF2-40B4-BE49-F238E27FC236}">
+                    <a16:creationId xmlns:a16="http://schemas.microsoft.com/office/drawing/2014/main" id="{C1BE2B37-B31B-3288-0D35-6621F0DD98D7}"/>
+                  </a:ext>
+                </a:extLst>
+              </p:cNvPr>
+              <p:cNvSpPr/>
+              <p:nvPr/>
+            </p:nvSpPr>
+            <p:spPr>
+              <a:xfrm>
+                <a:off x="4187810" y="1616073"/>
+                <a:ext cx="414119" cy="397284"/>
+              </a:xfrm>
+              <a:prstGeom prst="flowChartConnector">
+                <a:avLst/>
+              </a:prstGeom>
+              <a:solidFill>
+                <a:srgbClr val="303032"/>
+              </a:solidFill>
+              <a:ln>
+                <a:solidFill>
+                  <a:schemeClr val="tx1"/>
+                </a:solidFill>
+              </a:ln>
+            </p:spPr>
+            <p:style>
+              <a:lnRef idx="2">
+                <a:schemeClr val="accent1">
+                  <a:shade val="50000"/>
+                </a:schemeClr>
+              </a:lnRef>
+              <a:fillRef idx="1">
+                <a:schemeClr val="accent1"/>
+              </a:fillRef>
+              <a:effectRef idx="0">
+                <a:schemeClr val="accent1"/>
+              </a:effectRef>
+              <a:fontRef idx="minor">
+                <a:schemeClr val="lt1"/>
+              </a:fontRef>
+            </p:style>
+            <p:txBody>
+              <a:bodyPr rtlCol="0" anchor="ctr"/>
+              <a:lstStyle/>
+              <a:p>
+                <a:pPr algn="ctr"/>
+                <a:endParaRPr lang="en-US" dirty="0"/>
+              </a:p>
+            </p:txBody>
+          </p:sp>
+          <p:sp>
+            <p:nvSpPr>
+              <p:cNvPr id="93" name="Flowchart: Connector 92">
+                <a:extLst>
+                  <a:ext uri="{FF2B5EF4-FFF2-40B4-BE49-F238E27FC236}">
+                    <a16:creationId xmlns:a16="http://schemas.microsoft.com/office/drawing/2014/main" id="{842155A1-5A5F-7062-E8C3-554DF84CF697}"/>
+                  </a:ext>
+                </a:extLst>
+              </p:cNvPr>
+              <p:cNvSpPr/>
+              <p:nvPr/>
+            </p:nvSpPr>
+            <p:spPr>
+              <a:xfrm>
+                <a:off x="6442309" y="1616073"/>
+                <a:ext cx="414119" cy="397284"/>
+              </a:xfrm>
+              <a:prstGeom prst="flowChartConnector">
+                <a:avLst/>
+              </a:prstGeom>
+              <a:solidFill>
+                <a:schemeClr val="bg1"/>
+              </a:solidFill>
+              <a:ln>
+                <a:solidFill>
+                  <a:schemeClr val="tx1"/>
+                </a:solidFill>
+              </a:ln>
+            </p:spPr>
+            <p:style>
+              <a:lnRef idx="2">
+                <a:schemeClr val="accent1">
+                  <a:shade val="50000"/>
+                </a:schemeClr>
+              </a:lnRef>
+              <a:fillRef idx="1">
+                <a:schemeClr val="accent1"/>
+              </a:fillRef>
+              <a:effectRef idx="0">
+                <a:schemeClr val="accent1"/>
+              </a:effectRef>
+              <a:fontRef idx="minor">
+                <a:schemeClr val="lt1"/>
+              </a:fontRef>
+            </p:style>
+            <p:txBody>
+              <a:bodyPr rtlCol="0" anchor="ctr"/>
+              <a:lstStyle/>
+              <a:p>
+                <a:pPr algn="ctr"/>
+                <a:endParaRPr lang="en-US"/>
+              </a:p>
+            </p:txBody>
+          </p:sp>
+          <p:sp>
+            <p:nvSpPr>
+              <p:cNvPr id="94" name="Flowchart: Connector 93">
+                <a:extLst>
+                  <a:ext uri="{FF2B5EF4-FFF2-40B4-BE49-F238E27FC236}">
+                    <a16:creationId xmlns:a16="http://schemas.microsoft.com/office/drawing/2014/main" id="{F127DA36-C8D9-7806-1EF5-6F4D4BE9D84F}"/>
+                  </a:ext>
+                </a:extLst>
+              </p:cNvPr>
+              <p:cNvSpPr/>
+              <p:nvPr/>
+            </p:nvSpPr>
+            <p:spPr>
+              <a:xfrm>
+                <a:off x="7011185" y="1616073"/>
+                <a:ext cx="414119" cy="397284"/>
+              </a:xfrm>
+              <a:prstGeom prst="flowChartConnector">
+                <a:avLst/>
+              </a:prstGeom>
+              <a:solidFill>
+                <a:schemeClr val="bg1"/>
+              </a:solidFill>
+              <a:ln>
+                <a:solidFill>
+                  <a:schemeClr val="tx1"/>
+                </a:solidFill>
+              </a:ln>
+            </p:spPr>
+            <p:style>
+              <a:lnRef idx="2">
+                <a:schemeClr val="accent1">
+                  <a:shade val="50000"/>
+                </a:schemeClr>
+              </a:lnRef>
+              <a:fillRef idx="1">
+                <a:schemeClr val="accent1"/>
+              </a:fillRef>
+              <a:effectRef idx="0">
+                <a:schemeClr val="accent1"/>
+              </a:effectRef>
+              <a:fontRef idx="minor">
+                <a:schemeClr val="lt1"/>
+              </a:fontRef>
+            </p:style>
+            <p:txBody>
+              <a:bodyPr rtlCol="0" anchor="ctr"/>
+              <a:lstStyle/>
+              <a:p>
+                <a:pPr algn="ctr"/>
+                <a:endParaRPr lang="en-US"/>
+              </a:p>
+            </p:txBody>
+          </p:sp>
+          <p:sp>
+            <p:nvSpPr>
+              <p:cNvPr id="95" name="Flowchart: Connector 94">
+                <a:extLst>
+                  <a:ext uri="{FF2B5EF4-FFF2-40B4-BE49-F238E27FC236}">
+                    <a16:creationId xmlns:a16="http://schemas.microsoft.com/office/drawing/2014/main" id="{4C00045E-2E5A-8B57-07B4-1E878F5269A2}"/>
+                  </a:ext>
+                </a:extLst>
+              </p:cNvPr>
+              <p:cNvSpPr/>
+              <p:nvPr/>
+            </p:nvSpPr>
+            <p:spPr>
+              <a:xfrm>
+                <a:off x="7559056" y="1616073"/>
+                <a:ext cx="414119" cy="397284"/>
+              </a:xfrm>
+              <a:prstGeom prst="flowChartConnector">
+                <a:avLst/>
+              </a:prstGeom>
+              <a:solidFill>
+                <a:schemeClr val="bg1"/>
+              </a:solidFill>
+              <a:ln>
+                <a:solidFill>
+                  <a:schemeClr val="tx1"/>
+                </a:solidFill>
+              </a:ln>
+            </p:spPr>
+            <p:style>
+              <a:lnRef idx="2">
+                <a:schemeClr val="accent1">
+                  <a:shade val="50000"/>
+                </a:schemeClr>
+              </a:lnRef>
+              <a:fillRef idx="1">
+                <a:schemeClr val="accent1"/>
+              </a:fillRef>
+              <a:effectRef idx="0">
+                <a:schemeClr val="accent1"/>
+              </a:effectRef>
+              <a:fontRef idx="minor">
+                <a:schemeClr val="lt1"/>
+              </a:fontRef>
+            </p:style>
+            <p:txBody>
+              <a:bodyPr rtlCol="0" anchor="ctr"/>
+              <a:lstStyle/>
+              <a:p>
+                <a:pPr algn="ctr"/>
+                <a:endParaRPr lang="en-US"/>
+              </a:p>
+            </p:txBody>
+          </p:sp>
+          <p:sp>
+            <p:nvSpPr>
+              <p:cNvPr id="96" name="Flowchart: Connector 95">
+                <a:extLst>
+                  <a:ext uri="{FF2B5EF4-FFF2-40B4-BE49-F238E27FC236}">
+                    <a16:creationId xmlns:a16="http://schemas.microsoft.com/office/drawing/2014/main" id="{3725FCD6-8A81-F295-9F43-68C5227531AA}"/>
+                  </a:ext>
+                </a:extLst>
+              </p:cNvPr>
+              <p:cNvSpPr/>
+              <p:nvPr/>
+            </p:nvSpPr>
+            <p:spPr>
+              <a:xfrm>
+                <a:off x="7549841" y="2087953"/>
+                <a:ext cx="414119" cy="397284"/>
+              </a:xfrm>
+              <a:prstGeom prst="flowChartConnector">
+                <a:avLst/>
+              </a:prstGeom>
+              <a:solidFill>
+                <a:schemeClr val="bg1"/>
+              </a:solidFill>
+              <a:ln>
+                <a:solidFill>
+                  <a:schemeClr val="tx1"/>
+                </a:solidFill>
+              </a:ln>
+            </p:spPr>
+            <p:style>
+              <a:lnRef idx="2">
+                <a:schemeClr val="accent1">
+                  <a:shade val="50000"/>
+                </a:schemeClr>
+              </a:lnRef>
+              <a:fillRef idx="1">
+                <a:schemeClr val="accent1"/>
+              </a:fillRef>
+              <a:effectRef idx="0">
+                <a:schemeClr val="accent1"/>
+              </a:effectRef>
+              <a:fontRef idx="minor">
+                <a:schemeClr val="lt1"/>
+              </a:fontRef>
+            </p:style>
+            <p:txBody>
+              <a:bodyPr rtlCol="0" anchor="ctr"/>
+              <a:lstStyle/>
+              <a:p>
+                <a:pPr algn="ctr"/>
+                <a:endParaRPr lang="en-US"/>
+              </a:p>
+            </p:txBody>
+          </p:sp>
+        </p:grpSp>
         <p:sp>
           <p:nvSpPr>
-            <p:cNvPr id="8" name="Flowchart: Connector 7">
+            <p:cNvPr id="5" name="Rectangle 4">
               <a:extLst>
                 <a:ext uri="{FF2B5EF4-FFF2-40B4-BE49-F238E27FC236}">
-                  <a16:creationId xmlns:a16="http://schemas.microsoft.com/office/drawing/2014/main" id="{29FD885F-7905-9962-5E05-37CB1C87C7BF}"/>
+                  <a16:creationId xmlns:a16="http://schemas.microsoft.com/office/drawing/2014/main" id="{152B5E5E-EE6E-842D-9F8A-1B3B761630A1}"/>
                 </a:ext>
               </a:extLst>
             </p:cNvPr>
@@ -3826,518 +6123,30 @@
           </p:nvSpPr>
           <p:spPr>
             <a:xfrm>
-              <a:off x="4775116" y="3474350"/>
-              <a:ext cx="414119" cy="397284"/>
+              <a:off x="3016204" y="1019656"/>
+              <a:ext cx="4427275" cy="3456958"/>
             </a:xfrm>
-            <a:prstGeom prst="flowChartConnector">
+            <a:prstGeom prst="rect">
               <a:avLst/>
             </a:prstGeom>
             <a:solidFill>
-              <a:schemeClr val="bg1"/>
+              <a:srgbClr val="598F35"/>
             </a:solidFill>
-            <a:ln>
-              <a:solidFill>
-                <a:schemeClr val="tx1"/>
-              </a:solidFill>
-            </a:ln>
+            <a:effectLst>
+              <a:softEdge rad="127000"/>
+            </a:effectLst>
           </p:spPr>
           <p:style>
             <a:lnRef idx="2">
-              <a:schemeClr val="accent1">
+              <a:schemeClr val="dk1">
                 <a:shade val="50000"/>
               </a:schemeClr>
             </a:lnRef>
             <a:fillRef idx="1">
-              <a:schemeClr val="accent1"/>
+              <a:schemeClr val="dk1"/>
             </a:fillRef>
             <a:effectRef idx="0">
-              <a:schemeClr val="accent1"/>
-            </a:effectRef>
-            <a:fontRef idx="minor">
-              <a:schemeClr val="lt1"/>
-            </a:fontRef>
-          </p:style>
-          <p:txBody>
-            <a:bodyPr rtlCol="0" anchor="ctr"/>
-            <a:lstStyle/>
-            <a:p>
-              <a:pPr algn="ctr"/>
-              <a:endParaRPr lang="en-US"/>
-            </a:p>
-          </p:txBody>
-        </p:sp>
-        <p:sp>
-          <p:nvSpPr>
-            <p:cNvPr id="9" name="Flowchart: Connector 8">
-              <a:extLst>
-                <a:ext uri="{FF2B5EF4-FFF2-40B4-BE49-F238E27FC236}">
-                  <a16:creationId xmlns:a16="http://schemas.microsoft.com/office/drawing/2014/main" id="{B99C08BB-5EF7-55F4-0AE3-A504762565EE}"/>
-                </a:ext>
-              </a:extLst>
-            </p:cNvPr>
-            <p:cNvSpPr/>
-            <p:nvPr/>
-          </p:nvSpPr>
-          <p:spPr>
-            <a:xfrm>
-              <a:off x="4779725" y="3946229"/>
-              <a:ext cx="414119" cy="397284"/>
-            </a:xfrm>
-            <a:prstGeom prst="flowChartConnector">
-              <a:avLst/>
-            </a:prstGeom>
-            <a:solidFill>
-              <a:schemeClr val="bg1"/>
-            </a:solidFill>
-            <a:ln>
-              <a:solidFill>
-                <a:schemeClr val="tx1"/>
-              </a:solidFill>
-            </a:ln>
-          </p:spPr>
-          <p:style>
-            <a:lnRef idx="2">
-              <a:schemeClr val="accent1">
-                <a:shade val="50000"/>
-              </a:schemeClr>
-            </a:lnRef>
-            <a:fillRef idx="1">
-              <a:schemeClr val="accent1"/>
-            </a:fillRef>
-            <a:effectRef idx="0">
-              <a:schemeClr val="accent1"/>
-            </a:effectRef>
-            <a:fontRef idx="minor">
-              <a:schemeClr val="lt1"/>
-            </a:fontRef>
-          </p:style>
-          <p:txBody>
-            <a:bodyPr rtlCol="0" anchor="ctr"/>
-            <a:lstStyle/>
-            <a:p>
-              <a:pPr algn="ctr"/>
-              <a:endParaRPr lang="en-US"/>
-            </a:p>
-          </p:txBody>
-        </p:sp>
-        <p:sp>
-          <p:nvSpPr>
-            <p:cNvPr id="10" name="Flowchart: Connector 9">
-              <a:extLst>
-                <a:ext uri="{FF2B5EF4-FFF2-40B4-BE49-F238E27FC236}">
-                  <a16:creationId xmlns:a16="http://schemas.microsoft.com/office/drawing/2014/main" id="{F475BB46-C7CE-DEE0-BFCD-1556326F44C0}"/>
-                </a:ext>
-              </a:extLst>
-            </p:cNvPr>
-            <p:cNvSpPr/>
-            <p:nvPr/>
-          </p:nvSpPr>
-          <p:spPr>
-            <a:xfrm>
-              <a:off x="5343992" y="3946229"/>
-              <a:ext cx="414119" cy="397284"/>
-            </a:xfrm>
-            <a:prstGeom prst="flowChartConnector">
-              <a:avLst/>
-            </a:prstGeom>
-            <a:solidFill>
-              <a:schemeClr val="bg1"/>
-            </a:solidFill>
-            <a:ln>
-              <a:solidFill>
-                <a:schemeClr val="tx1"/>
-              </a:solidFill>
-            </a:ln>
-          </p:spPr>
-          <p:style>
-            <a:lnRef idx="2">
-              <a:schemeClr val="accent1">
-                <a:shade val="50000"/>
-              </a:schemeClr>
-            </a:lnRef>
-            <a:fillRef idx="1">
-              <a:schemeClr val="accent1"/>
-            </a:fillRef>
-            <a:effectRef idx="0">
-              <a:schemeClr val="accent1"/>
-            </a:effectRef>
-            <a:fontRef idx="minor">
-              <a:schemeClr val="lt1"/>
-            </a:fontRef>
-          </p:style>
-          <p:txBody>
-            <a:bodyPr rtlCol="0" anchor="ctr"/>
-            <a:lstStyle/>
-            <a:p>
-              <a:pPr algn="ctr"/>
-              <a:endParaRPr lang="en-US"/>
-            </a:p>
-          </p:txBody>
-        </p:sp>
-        <p:sp>
-          <p:nvSpPr>
-            <p:cNvPr id="11" name="Flowchart: Connector 10">
-              <a:extLst>
-                <a:ext uri="{FF2B5EF4-FFF2-40B4-BE49-F238E27FC236}">
-                  <a16:creationId xmlns:a16="http://schemas.microsoft.com/office/drawing/2014/main" id="{EA6E9BFC-F847-C1D5-A613-841981EEE210}"/>
-                </a:ext>
-              </a:extLst>
-            </p:cNvPr>
-            <p:cNvSpPr/>
-            <p:nvPr/>
-          </p:nvSpPr>
-          <p:spPr>
-            <a:xfrm>
-              <a:off x="5908259" y="3946230"/>
-              <a:ext cx="414119" cy="397284"/>
-            </a:xfrm>
-            <a:prstGeom prst="flowChartConnector">
-              <a:avLst/>
-            </a:prstGeom>
-            <a:solidFill>
-              <a:schemeClr val="bg1"/>
-            </a:solidFill>
-            <a:ln>
-              <a:solidFill>
-                <a:schemeClr val="tx1"/>
-              </a:solidFill>
-            </a:ln>
-          </p:spPr>
-          <p:style>
-            <a:lnRef idx="2">
-              <a:schemeClr val="accent1">
-                <a:shade val="50000"/>
-              </a:schemeClr>
-            </a:lnRef>
-            <a:fillRef idx="1">
-              <a:schemeClr val="accent1"/>
-            </a:fillRef>
-            <a:effectRef idx="0">
-              <a:schemeClr val="accent1"/>
-            </a:effectRef>
-            <a:fontRef idx="minor">
-              <a:schemeClr val="lt1"/>
-            </a:fontRef>
-          </p:style>
-          <p:txBody>
-            <a:bodyPr rtlCol="0" anchor="ctr"/>
-            <a:lstStyle/>
-            <a:p>
-              <a:pPr algn="ctr"/>
-              <a:endParaRPr lang="en-US"/>
-            </a:p>
-          </p:txBody>
-        </p:sp>
-        <p:sp>
-          <p:nvSpPr>
-            <p:cNvPr id="12" name="Flowchart: Connector 11">
-              <a:extLst>
-                <a:ext uri="{FF2B5EF4-FFF2-40B4-BE49-F238E27FC236}">
-                  <a16:creationId xmlns:a16="http://schemas.microsoft.com/office/drawing/2014/main" id="{471C54F4-B758-CB6B-FF0D-D7A9BBE8C8C0}"/>
-                </a:ext>
-              </a:extLst>
-            </p:cNvPr>
-            <p:cNvSpPr/>
-            <p:nvPr/>
-          </p:nvSpPr>
-          <p:spPr>
-            <a:xfrm>
-              <a:off x="6472526" y="3946229"/>
-              <a:ext cx="414119" cy="397284"/>
-            </a:xfrm>
-            <a:prstGeom prst="flowChartConnector">
-              <a:avLst/>
-            </a:prstGeom>
-            <a:solidFill>
-              <a:schemeClr val="bg1"/>
-            </a:solidFill>
-            <a:ln>
-              <a:solidFill>
-                <a:schemeClr val="tx1"/>
-              </a:solidFill>
-            </a:ln>
-          </p:spPr>
-          <p:style>
-            <a:lnRef idx="2">
-              <a:schemeClr val="accent1">
-                <a:shade val="50000"/>
-              </a:schemeClr>
-            </a:lnRef>
-            <a:fillRef idx="1">
-              <a:schemeClr val="accent1"/>
-            </a:fillRef>
-            <a:effectRef idx="0">
-              <a:schemeClr val="accent1"/>
-            </a:effectRef>
-            <a:fontRef idx="minor">
-              <a:schemeClr val="lt1"/>
-            </a:fontRef>
-          </p:style>
-          <p:txBody>
-            <a:bodyPr rtlCol="0" anchor="ctr"/>
-            <a:lstStyle/>
-            <a:p>
-              <a:pPr algn="ctr"/>
-              <a:endParaRPr lang="en-US"/>
-            </a:p>
-          </p:txBody>
-        </p:sp>
-        <p:sp>
-          <p:nvSpPr>
-            <p:cNvPr id="13" name="Flowchart: Connector 12">
-              <a:extLst>
-                <a:ext uri="{FF2B5EF4-FFF2-40B4-BE49-F238E27FC236}">
-                  <a16:creationId xmlns:a16="http://schemas.microsoft.com/office/drawing/2014/main" id="{C06E7DBF-FDB7-C7B0-87A6-01D851D7EDA5}"/>
-                </a:ext>
-              </a:extLst>
-            </p:cNvPr>
-            <p:cNvSpPr/>
-            <p:nvPr/>
-          </p:nvSpPr>
-          <p:spPr>
-            <a:xfrm>
-              <a:off x="7020649" y="3946229"/>
-              <a:ext cx="414119" cy="397284"/>
-            </a:xfrm>
-            <a:prstGeom prst="flowChartConnector">
-              <a:avLst/>
-            </a:prstGeom>
-            <a:solidFill>
-              <a:schemeClr val="bg1"/>
-            </a:solidFill>
-            <a:ln>
-              <a:solidFill>
-                <a:schemeClr val="tx1"/>
-              </a:solidFill>
-            </a:ln>
-          </p:spPr>
-          <p:style>
-            <a:lnRef idx="2">
-              <a:schemeClr val="accent1">
-                <a:shade val="50000"/>
-              </a:schemeClr>
-            </a:lnRef>
-            <a:fillRef idx="1">
-              <a:schemeClr val="accent1"/>
-            </a:fillRef>
-            <a:effectRef idx="0">
-              <a:schemeClr val="accent1"/>
-            </a:effectRef>
-            <a:fontRef idx="minor">
-              <a:schemeClr val="lt1"/>
-            </a:fontRef>
-          </p:style>
-          <p:txBody>
-            <a:bodyPr rtlCol="0" anchor="ctr"/>
-            <a:lstStyle/>
-            <a:p>
-              <a:pPr algn="ctr"/>
-              <a:endParaRPr lang="en-US"/>
-            </a:p>
-          </p:txBody>
-        </p:sp>
-        <p:sp>
-          <p:nvSpPr>
-            <p:cNvPr id="14" name="Flowchart: Connector 13">
-              <a:extLst>
-                <a:ext uri="{FF2B5EF4-FFF2-40B4-BE49-F238E27FC236}">
-                  <a16:creationId xmlns:a16="http://schemas.microsoft.com/office/drawing/2014/main" id="{87A5106C-1DFF-CE7B-F02C-BABE5714041B}"/>
-                </a:ext>
-              </a:extLst>
-            </p:cNvPr>
-            <p:cNvSpPr/>
-            <p:nvPr/>
-          </p:nvSpPr>
-          <p:spPr>
-            <a:xfrm>
-              <a:off x="5343992" y="3474350"/>
-              <a:ext cx="414119" cy="397284"/>
-            </a:xfrm>
-            <a:prstGeom prst="flowChartConnector">
-              <a:avLst/>
-            </a:prstGeom>
-            <a:solidFill>
-              <a:schemeClr val="bg1"/>
-            </a:solidFill>
-            <a:ln>
-              <a:solidFill>
-                <a:schemeClr val="tx1"/>
-              </a:solidFill>
-            </a:ln>
-          </p:spPr>
-          <p:style>
-            <a:lnRef idx="2">
-              <a:schemeClr val="accent1">
-                <a:shade val="50000"/>
-              </a:schemeClr>
-            </a:lnRef>
-            <a:fillRef idx="1">
-              <a:schemeClr val="accent1"/>
-            </a:fillRef>
-            <a:effectRef idx="0">
-              <a:schemeClr val="accent1"/>
-            </a:effectRef>
-            <a:fontRef idx="minor">
-              <a:schemeClr val="lt1"/>
-            </a:fontRef>
-          </p:style>
-          <p:txBody>
-            <a:bodyPr rtlCol="0" anchor="ctr"/>
-            <a:lstStyle/>
-            <a:p>
-              <a:pPr algn="ctr"/>
-              <a:endParaRPr lang="en-US"/>
-            </a:p>
-          </p:txBody>
-        </p:sp>
-        <p:sp>
-          <p:nvSpPr>
-            <p:cNvPr id="15" name="Flowchart: Connector 14">
-              <a:extLst>
-                <a:ext uri="{FF2B5EF4-FFF2-40B4-BE49-F238E27FC236}">
-                  <a16:creationId xmlns:a16="http://schemas.microsoft.com/office/drawing/2014/main" id="{660616E0-0654-C8E7-DA89-EF9391164056}"/>
-                </a:ext>
-              </a:extLst>
-            </p:cNvPr>
-            <p:cNvSpPr/>
-            <p:nvPr/>
-          </p:nvSpPr>
-          <p:spPr>
-            <a:xfrm>
-              <a:off x="5891863" y="3474349"/>
-              <a:ext cx="414119" cy="397284"/>
-            </a:xfrm>
-            <a:prstGeom prst="flowChartConnector">
-              <a:avLst/>
-            </a:prstGeom>
-            <a:solidFill>
-              <a:schemeClr val="bg1"/>
-            </a:solidFill>
-            <a:ln>
-              <a:solidFill>
-                <a:schemeClr val="tx1"/>
-              </a:solidFill>
-            </a:ln>
-          </p:spPr>
-          <p:style>
-            <a:lnRef idx="2">
-              <a:schemeClr val="accent1">
-                <a:shade val="50000"/>
-              </a:schemeClr>
-            </a:lnRef>
-            <a:fillRef idx="1">
-              <a:schemeClr val="accent1"/>
-            </a:fillRef>
-            <a:effectRef idx="0">
-              <a:schemeClr val="accent1"/>
-            </a:effectRef>
-            <a:fontRef idx="minor">
-              <a:schemeClr val="lt1"/>
-            </a:fontRef>
-          </p:style>
-          <p:txBody>
-            <a:bodyPr rtlCol="0" anchor="ctr"/>
-            <a:lstStyle/>
-            <a:p>
-              <a:pPr algn="ctr"/>
-              <a:endParaRPr lang="en-US"/>
-            </a:p>
-          </p:txBody>
-        </p:sp>
-        <p:sp>
-          <p:nvSpPr>
-            <p:cNvPr id="16" name="Flowchart: Connector 15">
-              <a:extLst>
-                <a:ext uri="{FF2B5EF4-FFF2-40B4-BE49-F238E27FC236}">
-                  <a16:creationId xmlns:a16="http://schemas.microsoft.com/office/drawing/2014/main" id="{4669001D-CE58-3966-7C1A-C7A3845AD2A6}"/>
-                </a:ext>
-              </a:extLst>
-            </p:cNvPr>
-            <p:cNvSpPr/>
-            <p:nvPr/>
-          </p:nvSpPr>
-          <p:spPr>
-            <a:xfrm>
-              <a:off x="4215458" y="3946229"/>
-              <a:ext cx="414119" cy="397284"/>
-            </a:xfrm>
-            <a:prstGeom prst="flowChartConnector">
-              <a:avLst/>
-            </a:prstGeom>
-            <a:solidFill>
-              <a:schemeClr val="bg1"/>
-            </a:solidFill>
-            <a:ln>
-              <a:solidFill>
-                <a:schemeClr val="tx1"/>
-              </a:solidFill>
-            </a:ln>
-          </p:spPr>
-          <p:style>
-            <a:lnRef idx="2">
-              <a:schemeClr val="accent1">
-                <a:shade val="50000"/>
-              </a:schemeClr>
-            </a:lnRef>
-            <a:fillRef idx="1">
-              <a:schemeClr val="accent1"/>
-            </a:fillRef>
-            <a:effectRef idx="0">
-              <a:schemeClr val="accent1"/>
-            </a:effectRef>
-            <a:fontRef idx="minor">
-              <a:schemeClr val="lt1"/>
-            </a:fontRef>
-          </p:style>
-          <p:txBody>
-            <a:bodyPr rtlCol="0" anchor="ctr"/>
-            <a:lstStyle/>
-            <a:p>
-              <a:pPr algn="ctr"/>
-              <a:endParaRPr lang="en-US"/>
-            </a:p>
-          </p:txBody>
-        </p:sp>
-        <p:sp>
-          <p:nvSpPr>
-            <p:cNvPr id="17" name="Flowchart: Connector 16">
-              <a:extLst>
-                <a:ext uri="{FF2B5EF4-FFF2-40B4-BE49-F238E27FC236}">
-                  <a16:creationId xmlns:a16="http://schemas.microsoft.com/office/drawing/2014/main" id="{3E16350B-DAA4-3DC9-3BD6-BE6322F1FDF2}"/>
-                </a:ext>
-              </a:extLst>
-            </p:cNvPr>
-            <p:cNvSpPr/>
-            <p:nvPr/>
-          </p:nvSpPr>
-          <p:spPr>
-            <a:xfrm>
-              <a:off x="4206240" y="3474349"/>
-              <a:ext cx="414119" cy="397284"/>
-            </a:xfrm>
-            <a:prstGeom prst="flowChartConnector">
-              <a:avLst/>
-            </a:prstGeom>
-            <a:solidFill>
-              <a:schemeClr val="bg1"/>
-            </a:solidFill>
-            <a:ln>
-              <a:solidFill>
-                <a:schemeClr val="tx1"/>
-              </a:solidFill>
-            </a:ln>
-          </p:spPr>
-          <p:style>
-            <a:lnRef idx="2">
-              <a:schemeClr val="accent1">
-                <a:shade val="50000"/>
-              </a:schemeClr>
-            </a:lnRef>
-            <a:fillRef idx="1">
-              <a:schemeClr val="accent1"/>
-            </a:fillRef>
-            <a:effectRef idx="0">
-              <a:schemeClr val="accent1"/>
+              <a:schemeClr val="dk1"/>
             </a:effectRef>
             <a:fontRef idx="minor">
               <a:schemeClr val="lt1"/>
@@ -4349,1734 +6158,6 @@
             <a:p>
               <a:pPr algn="ctr"/>
               <a:endParaRPr lang="en-US" dirty="0"/>
-            </a:p>
-          </p:txBody>
-        </p:sp>
-        <p:sp>
-          <p:nvSpPr>
-            <p:cNvPr id="18" name="Flowchart: Connector 17">
-              <a:extLst>
-                <a:ext uri="{FF2B5EF4-FFF2-40B4-BE49-F238E27FC236}">
-                  <a16:creationId xmlns:a16="http://schemas.microsoft.com/office/drawing/2014/main" id="{C8BC0FF4-BD16-480D-1F22-4EB96A336034}"/>
-                </a:ext>
-              </a:extLst>
-            </p:cNvPr>
-            <p:cNvSpPr/>
-            <p:nvPr/>
-          </p:nvSpPr>
-          <p:spPr>
-            <a:xfrm>
-              <a:off x="6460739" y="3474349"/>
-              <a:ext cx="414119" cy="397284"/>
-            </a:xfrm>
-            <a:prstGeom prst="flowChartConnector">
-              <a:avLst/>
-            </a:prstGeom>
-            <a:solidFill>
-              <a:schemeClr val="bg1"/>
-            </a:solidFill>
-            <a:ln>
-              <a:solidFill>
-                <a:schemeClr val="tx1"/>
-              </a:solidFill>
-            </a:ln>
-          </p:spPr>
-          <p:style>
-            <a:lnRef idx="2">
-              <a:schemeClr val="accent1">
-                <a:shade val="50000"/>
-              </a:schemeClr>
-            </a:lnRef>
-            <a:fillRef idx="1">
-              <a:schemeClr val="accent1"/>
-            </a:fillRef>
-            <a:effectRef idx="0">
-              <a:schemeClr val="accent1"/>
-            </a:effectRef>
-            <a:fontRef idx="minor">
-              <a:schemeClr val="lt1"/>
-            </a:fontRef>
-          </p:style>
-          <p:txBody>
-            <a:bodyPr rtlCol="0" anchor="ctr"/>
-            <a:lstStyle/>
-            <a:p>
-              <a:pPr algn="ctr"/>
-              <a:endParaRPr lang="en-US"/>
-            </a:p>
-          </p:txBody>
-        </p:sp>
-        <p:sp>
-          <p:nvSpPr>
-            <p:cNvPr id="19" name="Flowchart: Connector 18">
-              <a:extLst>
-                <a:ext uri="{FF2B5EF4-FFF2-40B4-BE49-F238E27FC236}">
-                  <a16:creationId xmlns:a16="http://schemas.microsoft.com/office/drawing/2014/main" id="{533B5EBA-3835-1AD2-628A-21B1033F8347}"/>
-                </a:ext>
-              </a:extLst>
-            </p:cNvPr>
-            <p:cNvSpPr/>
-            <p:nvPr/>
-          </p:nvSpPr>
-          <p:spPr>
-            <a:xfrm>
-              <a:off x="7029615" y="3474349"/>
-              <a:ext cx="414119" cy="397284"/>
-            </a:xfrm>
-            <a:prstGeom prst="flowChartConnector">
-              <a:avLst/>
-            </a:prstGeom>
-            <a:solidFill>
-              <a:schemeClr val="bg1"/>
-            </a:solidFill>
-            <a:ln>
-              <a:solidFill>
-                <a:schemeClr val="tx1"/>
-              </a:solidFill>
-            </a:ln>
-          </p:spPr>
-          <p:style>
-            <a:lnRef idx="2">
-              <a:schemeClr val="accent1">
-                <a:shade val="50000"/>
-              </a:schemeClr>
-            </a:lnRef>
-            <a:fillRef idx="1">
-              <a:schemeClr val="accent1"/>
-            </a:fillRef>
-            <a:effectRef idx="0">
-              <a:schemeClr val="accent1"/>
-            </a:effectRef>
-            <a:fontRef idx="minor">
-              <a:schemeClr val="lt1"/>
-            </a:fontRef>
-          </p:style>
-          <p:txBody>
-            <a:bodyPr rtlCol="0" anchor="ctr"/>
-            <a:lstStyle/>
-            <a:p>
-              <a:pPr algn="ctr"/>
-              <a:endParaRPr lang="en-US"/>
-            </a:p>
-          </p:txBody>
-        </p:sp>
-        <p:sp>
-          <p:nvSpPr>
-            <p:cNvPr id="20" name="Flowchart: Connector 19">
-              <a:extLst>
-                <a:ext uri="{FF2B5EF4-FFF2-40B4-BE49-F238E27FC236}">
-                  <a16:creationId xmlns:a16="http://schemas.microsoft.com/office/drawing/2014/main" id="{EFA21642-0574-F4EF-7331-5CC225ECCA86}"/>
-                </a:ext>
-              </a:extLst>
-            </p:cNvPr>
-            <p:cNvSpPr/>
-            <p:nvPr/>
-          </p:nvSpPr>
-          <p:spPr>
-            <a:xfrm>
-              <a:off x="7577486" y="3474349"/>
-              <a:ext cx="414119" cy="397284"/>
-            </a:xfrm>
-            <a:prstGeom prst="flowChartConnector">
-              <a:avLst/>
-            </a:prstGeom>
-            <a:solidFill>
-              <a:schemeClr val="bg1"/>
-            </a:solidFill>
-            <a:ln>
-              <a:solidFill>
-                <a:schemeClr val="tx1"/>
-              </a:solidFill>
-            </a:ln>
-          </p:spPr>
-          <p:style>
-            <a:lnRef idx="2">
-              <a:schemeClr val="accent1">
-                <a:shade val="50000"/>
-              </a:schemeClr>
-            </a:lnRef>
-            <a:fillRef idx="1">
-              <a:schemeClr val="accent1"/>
-            </a:fillRef>
-            <a:effectRef idx="0">
-              <a:schemeClr val="accent1"/>
-            </a:effectRef>
-            <a:fontRef idx="minor">
-              <a:schemeClr val="lt1"/>
-            </a:fontRef>
-          </p:style>
-          <p:txBody>
-            <a:bodyPr rtlCol="0" anchor="ctr"/>
-            <a:lstStyle/>
-            <a:p>
-              <a:pPr algn="ctr"/>
-              <a:endParaRPr lang="en-US"/>
-            </a:p>
-          </p:txBody>
-        </p:sp>
-        <p:sp>
-          <p:nvSpPr>
-            <p:cNvPr id="21" name="Flowchart: Connector 20">
-              <a:extLst>
-                <a:ext uri="{FF2B5EF4-FFF2-40B4-BE49-F238E27FC236}">
-                  <a16:creationId xmlns:a16="http://schemas.microsoft.com/office/drawing/2014/main" id="{87113ABC-E592-770D-ED8E-B25EE2D3ED79}"/>
-                </a:ext>
-              </a:extLst>
-            </p:cNvPr>
-            <p:cNvSpPr/>
-            <p:nvPr/>
-          </p:nvSpPr>
-          <p:spPr>
-            <a:xfrm>
-              <a:off x="7568271" y="3946229"/>
-              <a:ext cx="414119" cy="397284"/>
-            </a:xfrm>
-            <a:prstGeom prst="flowChartConnector">
-              <a:avLst/>
-            </a:prstGeom>
-            <a:solidFill>
-              <a:schemeClr val="bg1"/>
-            </a:solidFill>
-            <a:ln>
-              <a:solidFill>
-                <a:schemeClr val="tx1"/>
-              </a:solidFill>
-            </a:ln>
-          </p:spPr>
-          <p:style>
-            <a:lnRef idx="2">
-              <a:schemeClr val="accent1">
-                <a:shade val="50000"/>
-              </a:schemeClr>
-            </a:lnRef>
-            <a:fillRef idx="1">
-              <a:schemeClr val="accent1"/>
-            </a:fillRef>
-            <a:effectRef idx="0">
-              <a:schemeClr val="accent1"/>
-            </a:effectRef>
-            <a:fontRef idx="minor">
-              <a:schemeClr val="lt1"/>
-            </a:fontRef>
-          </p:style>
-          <p:txBody>
-            <a:bodyPr rtlCol="0" anchor="ctr"/>
-            <a:lstStyle/>
-            <a:p>
-              <a:pPr algn="ctr"/>
-              <a:endParaRPr lang="en-US"/>
-            </a:p>
-          </p:txBody>
-        </p:sp>
-        <p:sp>
-          <p:nvSpPr>
-            <p:cNvPr id="69" name="Flowchart: Connector 68">
-              <a:extLst>
-                <a:ext uri="{FF2B5EF4-FFF2-40B4-BE49-F238E27FC236}">
-                  <a16:creationId xmlns:a16="http://schemas.microsoft.com/office/drawing/2014/main" id="{81818A59-F212-46B9-0372-FFFC6B682EE2}"/>
-                </a:ext>
-              </a:extLst>
-            </p:cNvPr>
-            <p:cNvSpPr/>
-            <p:nvPr/>
-          </p:nvSpPr>
-          <p:spPr>
-            <a:xfrm>
-              <a:off x="4765901" y="2559836"/>
-              <a:ext cx="414119" cy="397284"/>
-            </a:xfrm>
-            <a:prstGeom prst="flowChartConnector">
-              <a:avLst/>
-            </a:prstGeom>
-            <a:solidFill>
-              <a:schemeClr val="bg1"/>
-            </a:solidFill>
-            <a:ln>
-              <a:solidFill>
-                <a:schemeClr val="tx1"/>
-              </a:solidFill>
-            </a:ln>
-          </p:spPr>
-          <p:style>
-            <a:lnRef idx="2">
-              <a:schemeClr val="accent1">
-                <a:shade val="50000"/>
-              </a:schemeClr>
-            </a:lnRef>
-            <a:fillRef idx="1">
-              <a:schemeClr val="accent1"/>
-            </a:fillRef>
-            <a:effectRef idx="0">
-              <a:schemeClr val="accent1"/>
-            </a:effectRef>
-            <a:fontRef idx="minor">
-              <a:schemeClr val="lt1"/>
-            </a:fontRef>
-          </p:style>
-          <p:txBody>
-            <a:bodyPr rtlCol="0" anchor="ctr"/>
-            <a:lstStyle/>
-            <a:p>
-              <a:pPr algn="ctr"/>
-              <a:endParaRPr lang="en-US"/>
-            </a:p>
-          </p:txBody>
-        </p:sp>
-        <p:sp>
-          <p:nvSpPr>
-            <p:cNvPr id="70" name="Flowchart: Connector 69">
-              <a:extLst>
-                <a:ext uri="{FF2B5EF4-FFF2-40B4-BE49-F238E27FC236}">
-                  <a16:creationId xmlns:a16="http://schemas.microsoft.com/office/drawing/2014/main" id="{D614A4E8-658E-32F3-56AF-49C1B2CE3C49}"/>
-                </a:ext>
-              </a:extLst>
-            </p:cNvPr>
-            <p:cNvSpPr/>
-            <p:nvPr/>
-          </p:nvSpPr>
-          <p:spPr>
-            <a:xfrm>
-              <a:off x="4770510" y="3031715"/>
-              <a:ext cx="414119" cy="397284"/>
-            </a:xfrm>
-            <a:prstGeom prst="flowChartConnector">
-              <a:avLst/>
-            </a:prstGeom>
-            <a:solidFill>
-              <a:schemeClr val="bg1"/>
-            </a:solidFill>
-            <a:ln>
-              <a:solidFill>
-                <a:schemeClr val="tx1"/>
-              </a:solidFill>
-            </a:ln>
-          </p:spPr>
-          <p:style>
-            <a:lnRef idx="2">
-              <a:schemeClr val="accent1">
-                <a:shade val="50000"/>
-              </a:schemeClr>
-            </a:lnRef>
-            <a:fillRef idx="1">
-              <a:schemeClr val="accent1"/>
-            </a:fillRef>
-            <a:effectRef idx="0">
-              <a:schemeClr val="accent1"/>
-            </a:effectRef>
-            <a:fontRef idx="minor">
-              <a:schemeClr val="lt1"/>
-            </a:fontRef>
-          </p:style>
-          <p:txBody>
-            <a:bodyPr rtlCol="0" anchor="ctr"/>
-            <a:lstStyle/>
-            <a:p>
-              <a:pPr algn="ctr"/>
-              <a:endParaRPr lang="en-US"/>
-            </a:p>
-          </p:txBody>
-        </p:sp>
-        <p:sp>
-          <p:nvSpPr>
-            <p:cNvPr id="71" name="Flowchart: Connector 70">
-              <a:extLst>
-                <a:ext uri="{FF2B5EF4-FFF2-40B4-BE49-F238E27FC236}">
-                  <a16:creationId xmlns:a16="http://schemas.microsoft.com/office/drawing/2014/main" id="{9A3F726C-340C-744E-B0B7-13FEC46ED44A}"/>
-                </a:ext>
-              </a:extLst>
-            </p:cNvPr>
-            <p:cNvSpPr/>
-            <p:nvPr/>
-          </p:nvSpPr>
-          <p:spPr>
-            <a:xfrm>
-              <a:off x="5334777" y="3031715"/>
-              <a:ext cx="414119" cy="397284"/>
-            </a:xfrm>
-            <a:prstGeom prst="flowChartConnector">
-              <a:avLst/>
-            </a:prstGeom>
-            <a:solidFill>
-              <a:schemeClr val="bg1"/>
-            </a:solidFill>
-            <a:ln>
-              <a:solidFill>
-                <a:schemeClr val="tx1"/>
-              </a:solidFill>
-            </a:ln>
-          </p:spPr>
-          <p:style>
-            <a:lnRef idx="2">
-              <a:schemeClr val="accent1">
-                <a:shade val="50000"/>
-              </a:schemeClr>
-            </a:lnRef>
-            <a:fillRef idx="1">
-              <a:schemeClr val="accent1"/>
-            </a:fillRef>
-            <a:effectRef idx="0">
-              <a:schemeClr val="accent1"/>
-            </a:effectRef>
-            <a:fontRef idx="minor">
-              <a:schemeClr val="lt1"/>
-            </a:fontRef>
-          </p:style>
-          <p:txBody>
-            <a:bodyPr rtlCol="0" anchor="ctr"/>
-            <a:lstStyle/>
-            <a:p>
-              <a:pPr algn="ctr"/>
-              <a:endParaRPr lang="en-US"/>
-            </a:p>
-          </p:txBody>
-        </p:sp>
-        <p:sp>
-          <p:nvSpPr>
-            <p:cNvPr id="72" name="Flowchart: Connector 71">
-              <a:extLst>
-                <a:ext uri="{FF2B5EF4-FFF2-40B4-BE49-F238E27FC236}">
-                  <a16:creationId xmlns:a16="http://schemas.microsoft.com/office/drawing/2014/main" id="{297032EE-8B7E-753C-5CA6-31615B786432}"/>
-                </a:ext>
-              </a:extLst>
-            </p:cNvPr>
-            <p:cNvSpPr/>
-            <p:nvPr/>
-          </p:nvSpPr>
-          <p:spPr>
-            <a:xfrm>
-              <a:off x="5899044" y="3031716"/>
-              <a:ext cx="414119" cy="397284"/>
-            </a:xfrm>
-            <a:prstGeom prst="flowChartConnector">
-              <a:avLst/>
-            </a:prstGeom>
-            <a:solidFill>
-              <a:schemeClr val="bg1"/>
-            </a:solidFill>
-            <a:ln>
-              <a:solidFill>
-                <a:schemeClr val="tx1"/>
-              </a:solidFill>
-            </a:ln>
-          </p:spPr>
-          <p:style>
-            <a:lnRef idx="2">
-              <a:schemeClr val="accent1">
-                <a:shade val="50000"/>
-              </a:schemeClr>
-            </a:lnRef>
-            <a:fillRef idx="1">
-              <a:schemeClr val="accent1"/>
-            </a:fillRef>
-            <a:effectRef idx="0">
-              <a:schemeClr val="accent1"/>
-            </a:effectRef>
-            <a:fontRef idx="minor">
-              <a:schemeClr val="lt1"/>
-            </a:fontRef>
-          </p:style>
-          <p:txBody>
-            <a:bodyPr rtlCol="0" anchor="ctr"/>
-            <a:lstStyle/>
-            <a:p>
-              <a:pPr algn="ctr"/>
-              <a:endParaRPr lang="en-US"/>
-            </a:p>
-          </p:txBody>
-        </p:sp>
-        <p:sp>
-          <p:nvSpPr>
-            <p:cNvPr id="73" name="Flowchart: Connector 72">
-              <a:extLst>
-                <a:ext uri="{FF2B5EF4-FFF2-40B4-BE49-F238E27FC236}">
-                  <a16:creationId xmlns:a16="http://schemas.microsoft.com/office/drawing/2014/main" id="{CC4919DF-3E69-0625-6131-D9E0011062BB}"/>
-                </a:ext>
-              </a:extLst>
-            </p:cNvPr>
-            <p:cNvSpPr/>
-            <p:nvPr/>
-          </p:nvSpPr>
-          <p:spPr>
-            <a:xfrm>
-              <a:off x="6463311" y="3031715"/>
-              <a:ext cx="414119" cy="397284"/>
-            </a:xfrm>
-            <a:prstGeom prst="flowChartConnector">
-              <a:avLst/>
-            </a:prstGeom>
-            <a:solidFill>
-              <a:schemeClr val="bg1"/>
-            </a:solidFill>
-            <a:ln>
-              <a:solidFill>
-                <a:schemeClr val="tx1"/>
-              </a:solidFill>
-            </a:ln>
-          </p:spPr>
-          <p:style>
-            <a:lnRef idx="2">
-              <a:schemeClr val="accent1">
-                <a:shade val="50000"/>
-              </a:schemeClr>
-            </a:lnRef>
-            <a:fillRef idx="1">
-              <a:schemeClr val="accent1"/>
-            </a:fillRef>
-            <a:effectRef idx="0">
-              <a:schemeClr val="accent1"/>
-            </a:effectRef>
-            <a:fontRef idx="minor">
-              <a:schemeClr val="lt1"/>
-            </a:fontRef>
-          </p:style>
-          <p:txBody>
-            <a:bodyPr rtlCol="0" anchor="ctr"/>
-            <a:lstStyle/>
-            <a:p>
-              <a:pPr algn="ctr"/>
-              <a:endParaRPr lang="en-US"/>
-            </a:p>
-          </p:txBody>
-        </p:sp>
-        <p:sp>
-          <p:nvSpPr>
-            <p:cNvPr id="74" name="Flowchart: Connector 73">
-              <a:extLst>
-                <a:ext uri="{FF2B5EF4-FFF2-40B4-BE49-F238E27FC236}">
-                  <a16:creationId xmlns:a16="http://schemas.microsoft.com/office/drawing/2014/main" id="{E818BC44-7D5F-A47A-A33C-7F13FD868E70}"/>
-                </a:ext>
-              </a:extLst>
-            </p:cNvPr>
-            <p:cNvSpPr/>
-            <p:nvPr/>
-          </p:nvSpPr>
-          <p:spPr>
-            <a:xfrm>
-              <a:off x="7011434" y="3031715"/>
-              <a:ext cx="414119" cy="397284"/>
-            </a:xfrm>
-            <a:prstGeom prst="flowChartConnector">
-              <a:avLst/>
-            </a:prstGeom>
-            <a:solidFill>
-              <a:schemeClr val="bg1"/>
-            </a:solidFill>
-            <a:ln>
-              <a:solidFill>
-                <a:schemeClr val="tx1"/>
-              </a:solidFill>
-            </a:ln>
-          </p:spPr>
-          <p:style>
-            <a:lnRef idx="2">
-              <a:schemeClr val="accent1">
-                <a:shade val="50000"/>
-              </a:schemeClr>
-            </a:lnRef>
-            <a:fillRef idx="1">
-              <a:schemeClr val="accent1"/>
-            </a:fillRef>
-            <a:effectRef idx="0">
-              <a:schemeClr val="accent1"/>
-            </a:effectRef>
-            <a:fontRef idx="minor">
-              <a:schemeClr val="lt1"/>
-            </a:fontRef>
-          </p:style>
-          <p:txBody>
-            <a:bodyPr rtlCol="0" anchor="ctr"/>
-            <a:lstStyle/>
-            <a:p>
-              <a:pPr algn="ctr"/>
-              <a:endParaRPr lang="en-US"/>
-            </a:p>
-          </p:txBody>
-        </p:sp>
-        <p:sp>
-          <p:nvSpPr>
-            <p:cNvPr id="75" name="Flowchart: Connector 74">
-              <a:extLst>
-                <a:ext uri="{FF2B5EF4-FFF2-40B4-BE49-F238E27FC236}">
-                  <a16:creationId xmlns:a16="http://schemas.microsoft.com/office/drawing/2014/main" id="{65DBE393-561D-7C66-D4D2-8ABE08A897BE}"/>
-                </a:ext>
-              </a:extLst>
-            </p:cNvPr>
-            <p:cNvSpPr/>
-            <p:nvPr/>
-          </p:nvSpPr>
-          <p:spPr>
-            <a:xfrm>
-              <a:off x="5334777" y="2559836"/>
-              <a:ext cx="414119" cy="397284"/>
-            </a:xfrm>
-            <a:prstGeom prst="flowChartConnector">
-              <a:avLst/>
-            </a:prstGeom>
-            <a:solidFill>
-              <a:schemeClr val="bg1"/>
-            </a:solidFill>
-            <a:ln>
-              <a:solidFill>
-                <a:schemeClr val="tx1"/>
-              </a:solidFill>
-            </a:ln>
-          </p:spPr>
-          <p:style>
-            <a:lnRef idx="2">
-              <a:schemeClr val="accent1">
-                <a:shade val="50000"/>
-              </a:schemeClr>
-            </a:lnRef>
-            <a:fillRef idx="1">
-              <a:schemeClr val="accent1"/>
-            </a:fillRef>
-            <a:effectRef idx="0">
-              <a:schemeClr val="accent1"/>
-            </a:effectRef>
-            <a:fontRef idx="minor">
-              <a:schemeClr val="lt1"/>
-            </a:fontRef>
-          </p:style>
-          <p:txBody>
-            <a:bodyPr rtlCol="0" anchor="ctr"/>
-            <a:lstStyle/>
-            <a:p>
-              <a:pPr algn="ctr"/>
-              <a:endParaRPr lang="en-US"/>
-            </a:p>
-          </p:txBody>
-        </p:sp>
-        <p:sp>
-          <p:nvSpPr>
-            <p:cNvPr id="76" name="Flowchart: Connector 75">
-              <a:extLst>
-                <a:ext uri="{FF2B5EF4-FFF2-40B4-BE49-F238E27FC236}">
-                  <a16:creationId xmlns:a16="http://schemas.microsoft.com/office/drawing/2014/main" id="{7B6B3964-3640-521C-6927-9A4B856BF9AF}"/>
-                </a:ext>
-              </a:extLst>
-            </p:cNvPr>
-            <p:cNvSpPr/>
-            <p:nvPr/>
-          </p:nvSpPr>
-          <p:spPr>
-            <a:xfrm>
-              <a:off x="5882648" y="2559835"/>
-              <a:ext cx="414119" cy="397284"/>
-            </a:xfrm>
-            <a:prstGeom prst="flowChartConnector">
-              <a:avLst/>
-            </a:prstGeom>
-            <a:solidFill>
-              <a:schemeClr val="bg1"/>
-            </a:solidFill>
-            <a:ln>
-              <a:solidFill>
-                <a:schemeClr val="tx1"/>
-              </a:solidFill>
-            </a:ln>
-          </p:spPr>
-          <p:style>
-            <a:lnRef idx="2">
-              <a:schemeClr val="accent1">
-                <a:shade val="50000"/>
-              </a:schemeClr>
-            </a:lnRef>
-            <a:fillRef idx="1">
-              <a:schemeClr val="accent1"/>
-            </a:fillRef>
-            <a:effectRef idx="0">
-              <a:schemeClr val="accent1"/>
-            </a:effectRef>
-            <a:fontRef idx="minor">
-              <a:schemeClr val="lt1"/>
-            </a:fontRef>
-          </p:style>
-          <p:txBody>
-            <a:bodyPr rtlCol="0" anchor="ctr"/>
-            <a:lstStyle/>
-            <a:p>
-              <a:pPr algn="ctr"/>
-              <a:endParaRPr lang="en-US"/>
-            </a:p>
-          </p:txBody>
-        </p:sp>
-        <p:sp>
-          <p:nvSpPr>
-            <p:cNvPr id="77" name="Flowchart: Connector 76">
-              <a:extLst>
-                <a:ext uri="{FF2B5EF4-FFF2-40B4-BE49-F238E27FC236}">
-                  <a16:creationId xmlns:a16="http://schemas.microsoft.com/office/drawing/2014/main" id="{1F7AD953-64D3-693F-121B-1A75BE8A44A6}"/>
-                </a:ext>
-              </a:extLst>
-            </p:cNvPr>
-            <p:cNvSpPr/>
-            <p:nvPr/>
-          </p:nvSpPr>
-          <p:spPr>
-            <a:xfrm>
-              <a:off x="4206243" y="3031715"/>
-              <a:ext cx="414119" cy="397284"/>
-            </a:xfrm>
-            <a:prstGeom prst="flowChartConnector">
-              <a:avLst/>
-            </a:prstGeom>
-            <a:solidFill>
-              <a:schemeClr val="bg1"/>
-            </a:solidFill>
-            <a:ln>
-              <a:solidFill>
-                <a:schemeClr val="tx1"/>
-              </a:solidFill>
-            </a:ln>
-          </p:spPr>
-          <p:style>
-            <a:lnRef idx="2">
-              <a:schemeClr val="accent1">
-                <a:shade val="50000"/>
-              </a:schemeClr>
-            </a:lnRef>
-            <a:fillRef idx="1">
-              <a:schemeClr val="accent1"/>
-            </a:fillRef>
-            <a:effectRef idx="0">
-              <a:schemeClr val="accent1"/>
-            </a:effectRef>
-            <a:fontRef idx="minor">
-              <a:schemeClr val="lt1"/>
-            </a:fontRef>
-          </p:style>
-          <p:txBody>
-            <a:bodyPr rtlCol="0" anchor="ctr"/>
-            <a:lstStyle/>
-            <a:p>
-              <a:pPr algn="ctr"/>
-              <a:endParaRPr lang="en-US"/>
-            </a:p>
-          </p:txBody>
-        </p:sp>
-        <p:sp>
-          <p:nvSpPr>
-            <p:cNvPr id="78" name="Flowchart: Connector 77">
-              <a:extLst>
-                <a:ext uri="{FF2B5EF4-FFF2-40B4-BE49-F238E27FC236}">
-                  <a16:creationId xmlns:a16="http://schemas.microsoft.com/office/drawing/2014/main" id="{B608C5AE-4A6D-1B7E-541E-457D8887D94C}"/>
-                </a:ext>
-              </a:extLst>
-            </p:cNvPr>
-            <p:cNvSpPr/>
-            <p:nvPr/>
-          </p:nvSpPr>
-          <p:spPr>
-            <a:xfrm>
-              <a:off x="4197025" y="2559835"/>
-              <a:ext cx="414119" cy="397284"/>
-            </a:xfrm>
-            <a:prstGeom prst="flowChartConnector">
-              <a:avLst/>
-            </a:prstGeom>
-            <a:solidFill>
-              <a:schemeClr val="bg1"/>
-            </a:solidFill>
-            <a:ln>
-              <a:solidFill>
-                <a:schemeClr val="tx1"/>
-              </a:solidFill>
-            </a:ln>
-          </p:spPr>
-          <p:style>
-            <a:lnRef idx="2">
-              <a:schemeClr val="accent1">
-                <a:shade val="50000"/>
-              </a:schemeClr>
-            </a:lnRef>
-            <a:fillRef idx="1">
-              <a:schemeClr val="accent1"/>
-            </a:fillRef>
-            <a:effectRef idx="0">
-              <a:schemeClr val="accent1"/>
-            </a:effectRef>
-            <a:fontRef idx="minor">
-              <a:schemeClr val="lt1"/>
-            </a:fontRef>
-          </p:style>
-          <p:txBody>
-            <a:bodyPr rtlCol="0" anchor="ctr"/>
-            <a:lstStyle/>
-            <a:p>
-              <a:pPr algn="ctr"/>
-              <a:endParaRPr lang="en-US" dirty="0"/>
-            </a:p>
-          </p:txBody>
-        </p:sp>
-        <p:sp>
-          <p:nvSpPr>
-            <p:cNvPr id="79" name="Flowchart: Connector 78">
-              <a:extLst>
-                <a:ext uri="{FF2B5EF4-FFF2-40B4-BE49-F238E27FC236}">
-                  <a16:creationId xmlns:a16="http://schemas.microsoft.com/office/drawing/2014/main" id="{ED0DEC2A-5A60-BC64-740D-6E7AF1B0B888}"/>
-                </a:ext>
-              </a:extLst>
-            </p:cNvPr>
-            <p:cNvSpPr/>
-            <p:nvPr/>
-          </p:nvSpPr>
-          <p:spPr>
-            <a:xfrm>
-              <a:off x="6451524" y="2559835"/>
-              <a:ext cx="414119" cy="397284"/>
-            </a:xfrm>
-            <a:prstGeom prst="flowChartConnector">
-              <a:avLst/>
-            </a:prstGeom>
-            <a:solidFill>
-              <a:schemeClr val="bg1"/>
-            </a:solidFill>
-            <a:ln>
-              <a:solidFill>
-                <a:schemeClr val="tx1"/>
-              </a:solidFill>
-            </a:ln>
-          </p:spPr>
-          <p:style>
-            <a:lnRef idx="2">
-              <a:schemeClr val="accent1">
-                <a:shade val="50000"/>
-              </a:schemeClr>
-            </a:lnRef>
-            <a:fillRef idx="1">
-              <a:schemeClr val="accent1"/>
-            </a:fillRef>
-            <a:effectRef idx="0">
-              <a:schemeClr val="accent1"/>
-            </a:effectRef>
-            <a:fontRef idx="minor">
-              <a:schemeClr val="lt1"/>
-            </a:fontRef>
-          </p:style>
-          <p:txBody>
-            <a:bodyPr rtlCol="0" anchor="ctr"/>
-            <a:lstStyle/>
-            <a:p>
-              <a:pPr algn="ctr"/>
-              <a:endParaRPr lang="en-US"/>
-            </a:p>
-          </p:txBody>
-        </p:sp>
-        <p:sp>
-          <p:nvSpPr>
-            <p:cNvPr id="80" name="Flowchart: Connector 79">
-              <a:extLst>
-                <a:ext uri="{FF2B5EF4-FFF2-40B4-BE49-F238E27FC236}">
-                  <a16:creationId xmlns:a16="http://schemas.microsoft.com/office/drawing/2014/main" id="{8AA7D0A7-6F55-39F4-AD34-647398E7A09E}"/>
-                </a:ext>
-              </a:extLst>
-            </p:cNvPr>
-            <p:cNvSpPr/>
-            <p:nvPr/>
-          </p:nvSpPr>
-          <p:spPr>
-            <a:xfrm>
-              <a:off x="7020400" y="2559835"/>
-              <a:ext cx="414119" cy="397284"/>
-            </a:xfrm>
-            <a:prstGeom prst="flowChartConnector">
-              <a:avLst/>
-            </a:prstGeom>
-            <a:solidFill>
-              <a:schemeClr val="bg1"/>
-            </a:solidFill>
-            <a:ln>
-              <a:solidFill>
-                <a:schemeClr val="tx1"/>
-              </a:solidFill>
-            </a:ln>
-          </p:spPr>
-          <p:style>
-            <a:lnRef idx="2">
-              <a:schemeClr val="accent1">
-                <a:shade val="50000"/>
-              </a:schemeClr>
-            </a:lnRef>
-            <a:fillRef idx="1">
-              <a:schemeClr val="accent1"/>
-            </a:fillRef>
-            <a:effectRef idx="0">
-              <a:schemeClr val="accent1"/>
-            </a:effectRef>
-            <a:fontRef idx="minor">
-              <a:schemeClr val="lt1"/>
-            </a:fontRef>
-          </p:style>
-          <p:txBody>
-            <a:bodyPr rtlCol="0" anchor="ctr"/>
-            <a:lstStyle/>
-            <a:p>
-              <a:pPr algn="ctr"/>
-              <a:endParaRPr lang="en-US"/>
-            </a:p>
-          </p:txBody>
-        </p:sp>
-        <p:sp>
-          <p:nvSpPr>
-            <p:cNvPr id="81" name="Flowchart: Connector 80">
-              <a:extLst>
-                <a:ext uri="{FF2B5EF4-FFF2-40B4-BE49-F238E27FC236}">
-                  <a16:creationId xmlns:a16="http://schemas.microsoft.com/office/drawing/2014/main" id="{27F36636-9072-5A5F-CA84-6046B863500C}"/>
-                </a:ext>
-              </a:extLst>
-            </p:cNvPr>
-            <p:cNvSpPr/>
-            <p:nvPr/>
-          </p:nvSpPr>
-          <p:spPr>
-            <a:xfrm>
-              <a:off x="7568271" y="2559835"/>
-              <a:ext cx="414119" cy="397284"/>
-            </a:xfrm>
-            <a:prstGeom prst="flowChartConnector">
-              <a:avLst/>
-            </a:prstGeom>
-            <a:solidFill>
-              <a:schemeClr val="bg1"/>
-            </a:solidFill>
-            <a:ln>
-              <a:solidFill>
-                <a:schemeClr val="tx1"/>
-              </a:solidFill>
-            </a:ln>
-          </p:spPr>
-          <p:style>
-            <a:lnRef idx="2">
-              <a:schemeClr val="accent1">
-                <a:shade val="50000"/>
-              </a:schemeClr>
-            </a:lnRef>
-            <a:fillRef idx="1">
-              <a:schemeClr val="accent1"/>
-            </a:fillRef>
-            <a:effectRef idx="0">
-              <a:schemeClr val="accent1"/>
-            </a:effectRef>
-            <a:fontRef idx="minor">
-              <a:schemeClr val="lt1"/>
-            </a:fontRef>
-          </p:style>
-          <p:txBody>
-            <a:bodyPr rtlCol="0" anchor="ctr"/>
-            <a:lstStyle/>
-            <a:p>
-              <a:pPr algn="ctr"/>
-              <a:endParaRPr lang="en-US"/>
-            </a:p>
-          </p:txBody>
-        </p:sp>
-        <p:sp>
-          <p:nvSpPr>
-            <p:cNvPr id="82" name="Flowchart: Connector 81">
-              <a:extLst>
-                <a:ext uri="{FF2B5EF4-FFF2-40B4-BE49-F238E27FC236}">
-                  <a16:creationId xmlns:a16="http://schemas.microsoft.com/office/drawing/2014/main" id="{5E2D515D-9034-115E-007B-83AA7D326E7B}"/>
-                </a:ext>
-              </a:extLst>
-            </p:cNvPr>
-            <p:cNvSpPr/>
-            <p:nvPr/>
-          </p:nvSpPr>
-          <p:spPr>
-            <a:xfrm>
-              <a:off x="7559056" y="3031715"/>
-              <a:ext cx="414119" cy="397284"/>
-            </a:xfrm>
-            <a:prstGeom prst="flowChartConnector">
-              <a:avLst/>
-            </a:prstGeom>
-            <a:solidFill>
-              <a:schemeClr val="bg1"/>
-            </a:solidFill>
-            <a:ln>
-              <a:solidFill>
-                <a:schemeClr val="tx1"/>
-              </a:solidFill>
-            </a:ln>
-          </p:spPr>
-          <p:style>
-            <a:lnRef idx="2">
-              <a:schemeClr val="accent1">
-                <a:shade val="50000"/>
-              </a:schemeClr>
-            </a:lnRef>
-            <a:fillRef idx="1">
-              <a:schemeClr val="accent1"/>
-            </a:fillRef>
-            <a:effectRef idx="0">
-              <a:schemeClr val="accent1"/>
-            </a:effectRef>
-            <a:fontRef idx="minor">
-              <a:schemeClr val="lt1"/>
-            </a:fontRef>
-          </p:style>
-          <p:txBody>
-            <a:bodyPr rtlCol="0" anchor="ctr"/>
-            <a:lstStyle/>
-            <a:p>
-              <a:pPr algn="ctr"/>
-              <a:endParaRPr lang="en-US"/>
-            </a:p>
-          </p:txBody>
-        </p:sp>
-        <p:sp>
-          <p:nvSpPr>
-            <p:cNvPr id="83" name="Flowchart: Connector 82">
-              <a:extLst>
-                <a:ext uri="{FF2B5EF4-FFF2-40B4-BE49-F238E27FC236}">
-                  <a16:creationId xmlns:a16="http://schemas.microsoft.com/office/drawing/2014/main" id="{F397157C-6D13-4158-DE66-D8833220C657}"/>
-                </a:ext>
-              </a:extLst>
-            </p:cNvPr>
-            <p:cNvSpPr/>
-            <p:nvPr/>
-          </p:nvSpPr>
-          <p:spPr>
-            <a:xfrm>
-              <a:off x="4756686" y="1616074"/>
-              <a:ext cx="414119" cy="397284"/>
-            </a:xfrm>
-            <a:prstGeom prst="flowChartConnector">
-              <a:avLst/>
-            </a:prstGeom>
-            <a:solidFill>
-              <a:schemeClr val="bg1"/>
-            </a:solidFill>
-            <a:ln>
-              <a:solidFill>
-                <a:schemeClr val="tx1"/>
-              </a:solidFill>
-            </a:ln>
-          </p:spPr>
-          <p:style>
-            <a:lnRef idx="2">
-              <a:schemeClr val="accent1">
-                <a:shade val="50000"/>
-              </a:schemeClr>
-            </a:lnRef>
-            <a:fillRef idx="1">
-              <a:schemeClr val="accent1"/>
-            </a:fillRef>
-            <a:effectRef idx="0">
-              <a:schemeClr val="accent1"/>
-            </a:effectRef>
-            <a:fontRef idx="minor">
-              <a:schemeClr val="lt1"/>
-            </a:fontRef>
-          </p:style>
-          <p:txBody>
-            <a:bodyPr rtlCol="0" anchor="ctr"/>
-            <a:lstStyle/>
-            <a:p>
-              <a:pPr algn="ctr"/>
-              <a:endParaRPr lang="en-US"/>
-            </a:p>
-          </p:txBody>
-        </p:sp>
-        <p:sp>
-          <p:nvSpPr>
-            <p:cNvPr id="84" name="Flowchart: Connector 83">
-              <a:extLst>
-                <a:ext uri="{FF2B5EF4-FFF2-40B4-BE49-F238E27FC236}">
-                  <a16:creationId xmlns:a16="http://schemas.microsoft.com/office/drawing/2014/main" id="{8CF0CE90-2847-08AE-A6C7-28009449D85A}"/>
-                </a:ext>
-              </a:extLst>
-            </p:cNvPr>
-            <p:cNvSpPr/>
-            <p:nvPr/>
-          </p:nvSpPr>
-          <p:spPr>
-            <a:xfrm>
-              <a:off x="4761295" y="2087953"/>
-              <a:ext cx="414119" cy="397284"/>
-            </a:xfrm>
-            <a:prstGeom prst="flowChartConnector">
-              <a:avLst/>
-            </a:prstGeom>
-            <a:solidFill>
-              <a:schemeClr val="bg1"/>
-            </a:solidFill>
-            <a:ln>
-              <a:solidFill>
-                <a:schemeClr val="tx1"/>
-              </a:solidFill>
-            </a:ln>
-          </p:spPr>
-          <p:style>
-            <a:lnRef idx="2">
-              <a:schemeClr val="accent1">
-                <a:shade val="50000"/>
-              </a:schemeClr>
-            </a:lnRef>
-            <a:fillRef idx="1">
-              <a:schemeClr val="accent1"/>
-            </a:fillRef>
-            <a:effectRef idx="0">
-              <a:schemeClr val="accent1"/>
-            </a:effectRef>
-            <a:fontRef idx="minor">
-              <a:schemeClr val="lt1"/>
-            </a:fontRef>
-          </p:style>
-          <p:txBody>
-            <a:bodyPr rtlCol="0" anchor="ctr"/>
-            <a:lstStyle/>
-            <a:p>
-              <a:pPr algn="ctr"/>
-              <a:endParaRPr lang="en-US"/>
-            </a:p>
-          </p:txBody>
-        </p:sp>
-        <p:sp>
-          <p:nvSpPr>
-            <p:cNvPr id="85" name="Flowchart: Connector 84">
-              <a:extLst>
-                <a:ext uri="{FF2B5EF4-FFF2-40B4-BE49-F238E27FC236}">
-                  <a16:creationId xmlns:a16="http://schemas.microsoft.com/office/drawing/2014/main" id="{35E1CB15-F7CE-5AB0-046C-F73FEA8307C8}"/>
-                </a:ext>
-              </a:extLst>
-            </p:cNvPr>
-            <p:cNvSpPr/>
-            <p:nvPr/>
-          </p:nvSpPr>
-          <p:spPr>
-            <a:xfrm>
-              <a:off x="5325562" y="2087953"/>
-              <a:ext cx="414119" cy="397284"/>
-            </a:xfrm>
-            <a:prstGeom prst="flowChartConnector">
-              <a:avLst/>
-            </a:prstGeom>
-            <a:solidFill>
-              <a:schemeClr val="bg1"/>
-            </a:solidFill>
-            <a:ln>
-              <a:solidFill>
-                <a:schemeClr val="tx1"/>
-              </a:solidFill>
-            </a:ln>
-          </p:spPr>
-          <p:style>
-            <a:lnRef idx="2">
-              <a:schemeClr val="accent1">
-                <a:shade val="50000"/>
-              </a:schemeClr>
-            </a:lnRef>
-            <a:fillRef idx="1">
-              <a:schemeClr val="accent1"/>
-            </a:fillRef>
-            <a:effectRef idx="0">
-              <a:schemeClr val="accent1"/>
-            </a:effectRef>
-            <a:fontRef idx="minor">
-              <a:schemeClr val="lt1"/>
-            </a:fontRef>
-          </p:style>
-          <p:txBody>
-            <a:bodyPr rtlCol="0" anchor="ctr"/>
-            <a:lstStyle/>
-            <a:p>
-              <a:pPr algn="ctr"/>
-              <a:endParaRPr lang="en-US"/>
-            </a:p>
-          </p:txBody>
-        </p:sp>
-        <p:sp>
-          <p:nvSpPr>
-            <p:cNvPr id="86" name="Flowchart: Connector 85">
-              <a:extLst>
-                <a:ext uri="{FF2B5EF4-FFF2-40B4-BE49-F238E27FC236}">
-                  <a16:creationId xmlns:a16="http://schemas.microsoft.com/office/drawing/2014/main" id="{3B7A3467-23C7-D163-EA62-E373AFC87FA7}"/>
-                </a:ext>
-              </a:extLst>
-            </p:cNvPr>
-            <p:cNvSpPr/>
-            <p:nvPr/>
-          </p:nvSpPr>
-          <p:spPr>
-            <a:xfrm>
-              <a:off x="5889829" y="2087954"/>
-              <a:ext cx="414119" cy="397284"/>
-            </a:xfrm>
-            <a:prstGeom prst="flowChartConnector">
-              <a:avLst/>
-            </a:prstGeom>
-            <a:solidFill>
-              <a:schemeClr val="bg1"/>
-            </a:solidFill>
-            <a:ln>
-              <a:solidFill>
-                <a:schemeClr val="tx1"/>
-              </a:solidFill>
-            </a:ln>
-          </p:spPr>
-          <p:style>
-            <a:lnRef idx="2">
-              <a:schemeClr val="accent1">
-                <a:shade val="50000"/>
-              </a:schemeClr>
-            </a:lnRef>
-            <a:fillRef idx="1">
-              <a:schemeClr val="accent1"/>
-            </a:fillRef>
-            <a:effectRef idx="0">
-              <a:schemeClr val="accent1"/>
-            </a:effectRef>
-            <a:fontRef idx="minor">
-              <a:schemeClr val="lt1"/>
-            </a:fontRef>
-          </p:style>
-          <p:txBody>
-            <a:bodyPr rtlCol="0" anchor="ctr"/>
-            <a:lstStyle/>
-            <a:p>
-              <a:pPr algn="ctr"/>
-              <a:endParaRPr lang="en-US"/>
-            </a:p>
-          </p:txBody>
-        </p:sp>
-        <p:sp>
-          <p:nvSpPr>
-            <p:cNvPr id="87" name="Flowchart: Connector 86">
-              <a:extLst>
-                <a:ext uri="{FF2B5EF4-FFF2-40B4-BE49-F238E27FC236}">
-                  <a16:creationId xmlns:a16="http://schemas.microsoft.com/office/drawing/2014/main" id="{48B6B0C0-52EE-98D6-4D98-502197AD617A}"/>
-                </a:ext>
-              </a:extLst>
-            </p:cNvPr>
-            <p:cNvSpPr/>
-            <p:nvPr/>
-          </p:nvSpPr>
-          <p:spPr>
-            <a:xfrm>
-              <a:off x="6454096" y="2087953"/>
-              <a:ext cx="414119" cy="397284"/>
-            </a:xfrm>
-            <a:prstGeom prst="flowChartConnector">
-              <a:avLst/>
-            </a:prstGeom>
-            <a:solidFill>
-              <a:schemeClr val="bg1"/>
-            </a:solidFill>
-            <a:ln>
-              <a:solidFill>
-                <a:schemeClr val="tx1"/>
-              </a:solidFill>
-            </a:ln>
-          </p:spPr>
-          <p:style>
-            <a:lnRef idx="2">
-              <a:schemeClr val="accent1">
-                <a:shade val="50000"/>
-              </a:schemeClr>
-            </a:lnRef>
-            <a:fillRef idx="1">
-              <a:schemeClr val="accent1"/>
-            </a:fillRef>
-            <a:effectRef idx="0">
-              <a:schemeClr val="accent1"/>
-            </a:effectRef>
-            <a:fontRef idx="minor">
-              <a:schemeClr val="lt1"/>
-            </a:fontRef>
-          </p:style>
-          <p:txBody>
-            <a:bodyPr rtlCol="0" anchor="ctr"/>
-            <a:lstStyle/>
-            <a:p>
-              <a:pPr algn="ctr"/>
-              <a:endParaRPr lang="en-US"/>
-            </a:p>
-          </p:txBody>
-        </p:sp>
-        <p:sp>
-          <p:nvSpPr>
-            <p:cNvPr id="88" name="Flowchart: Connector 87">
-              <a:extLst>
-                <a:ext uri="{FF2B5EF4-FFF2-40B4-BE49-F238E27FC236}">
-                  <a16:creationId xmlns:a16="http://schemas.microsoft.com/office/drawing/2014/main" id="{789C4474-E98C-C047-C220-801A519A44C6}"/>
-                </a:ext>
-              </a:extLst>
-            </p:cNvPr>
-            <p:cNvSpPr/>
-            <p:nvPr/>
-          </p:nvSpPr>
-          <p:spPr>
-            <a:xfrm>
-              <a:off x="7002219" y="2087953"/>
-              <a:ext cx="414119" cy="397284"/>
-            </a:xfrm>
-            <a:prstGeom prst="flowChartConnector">
-              <a:avLst/>
-            </a:prstGeom>
-            <a:solidFill>
-              <a:schemeClr val="bg1"/>
-            </a:solidFill>
-            <a:ln>
-              <a:solidFill>
-                <a:schemeClr val="tx1"/>
-              </a:solidFill>
-            </a:ln>
-          </p:spPr>
-          <p:style>
-            <a:lnRef idx="2">
-              <a:schemeClr val="accent1">
-                <a:shade val="50000"/>
-              </a:schemeClr>
-            </a:lnRef>
-            <a:fillRef idx="1">
-              <a:schemeClr val="accent1"/>
-            </a:fillRef>
-            <a:effectRef idx="0">
-              <a:schemeClr val="accent1"/>
-            </a:effectRef>
-            <a:fontRef idx="minor">
-              <a:schemeClr val="lt1"/>
-            </a:fontRef>
-          </p:style>
-          <p:txBody>
-            <a:bodyPr rtlCol="0" anchor="ctr"/>
-            <a:lstStyle/>
-            <a:p>
-              <a:pPr algn="ctr"/>
-              <a:endParaRPr lang="en-US"/>
-            </a:p>
-          </p:txBody>
-        </p:sp>
-        <p:sp>
-          <p:nvSpPr>
-            <p:cNvPr id="89" name="Flowchart: Connector 88">
-              <a:extLst>
-                <a:ext uri="{FF2B5EF4-FFF2-40B4-BE49-F238E27FC236}">
-                  <a16:creationId xmlns:a16="http://schemas.microsoft.com/office/drawing/2014/main" id="{0E58F982-F4EC-33EC-7196-B88FE00E72C4}"/>
-                </a:ext>
-              </a:extLst>
-            </p:cNvPr>
-            <p:cNvSpPr/>
-            <p:nvPr/>
-          </p:nvSpPr>
-          <p:spPr>
-            <a:xfrm>
-              <a:off x="5325562" y="1616074"/>
-              <a:ext cx="414119" cy="397284"/>
-            </a:xfrm>
-            <a:prstGeom prst="flowChartConnector">
-              <a:avLst/>
-            </a:prstGeom>
-            <a:solidFill>
-              <a:schemeClr val="bg1"/>
-            </a:solidFill>
-            <a:ln>
-              <a:solidFill>
-                <a:schemeClr val="tx1"/>
-              </a:solidFill>
-            </a:ln>
-          </p:spPr>
-          <p:style>
-            <a:lnRef idx="2">
-              <a:schemeClr val="accent1">
-                <a:shade val="50000"/>
-              </a:schemeClr>
-            </a:lnRef>
-            <a:fillRef idx="1">
-              <a:schemeClr val="accent1"/>
-            </a:fillRef>
-            <a:effectRef idx="0">
-              <a:schemeClr val="accent1"/>
-            </a:effectRef>
-            <a:fontRef idx="minor">
-              <a:schemeClr val="lt1"/>
-            </a:fontRef>
-          </p:style>
-          <p:txBody>
-            <a:bodyPr rtlCol="0" anchor="ctr"/>
-            <a:lstStyle/>
-            <a:p>
-              <a:pPr algn="ctr"/>
-              <a:endParaRPr lang="en-US"/>
-            </a:p>
-          </p:txBody>
-        </p:sp>
-        <p:sp>
-          <p:nvSpPr>
-            <p:cNvPr id="90" name="Flowchart: Connector 89">
-              <a:extLst>
-                <a:ext uri="{FF2B5EF4-FFF2-40B4-BE49-F238E27FC236}">
-                  <a16:creationId xmlns:a16="http://schemas.microsoft.com/office/drawing/2014/main" id="{F6B17D1A-7D72-BF5D-33DD-545D0F8A3CA8}"/>
-                </a:ext>
-              </a:extLst>
-            </p:cNvPr>
-            <p:cNvSpPr/>
-            <p:nvPr/>
-          </p:nvSpPr>
-          <p:spPr>
-            <a:xfrm>
-              <a:off x="5873433" y="1616073"/>
-              <a:ext cx="414119" cy="397284"/>
-            </a:xfrm>
-            <a:prstGeom prst="flowChartConnector">
-              <a:avLst/>
-            </a:prstGeom>
-            <a:solidFill>
-              <a:schemeClr val="bg1"/>
-            </a:solidFill>
-            <a:ln>
-              <a:solidFill>
-                <a:schemeClr val="tx1"/>
-              </a:solidFill>
-            </a:ln>
-          </p:spPr>
-          <p:style>
-            <a:lnRef idx="2">
-              <a:schemeClr val="accent1">
-                <a:shade val="50000"/>
-              </a:schemeClr>
-            </a:lnRef>
-            <a:fillRef idx="1">
-              <a:schemeClr val="accent1"/>
-            </a:fillRef>
-            <a:effectRef idx="0">
-              <a:schemeClr val="accent1"/>
-            </a:effectRef>
-            <a:fontRef idx="minor">
-              <a:schemeClr val="lt1"/>
-            </a:fontRef>
-          </p:style>
-          <p:txBody>
-            <a:bodyPr rtlCol="0" anchor="ctr"/>
-            <a:lstStyle/>
-            <a:p>
-              <a:pPr algn="ctr"/>
-              <a:endParaRPr lang="en-US"/>
-            </a:p>
-          </p:txBody>
-        </p:sp>
-        <p:sp>
-          <p:nvSpPr>
-            <p:cNvPr id="91" name="Flowchart: Connector 90">
-              <a:extLst>
-                <a:ext uri="{FF2B5EF4-FFF2-40B4-BE49-F238E27FC236}">
-                  <a16:creationId xmlns:a16="http://schemas.microsoft.com/office/drawing/2014/main" id="{DBB58490-4C4A-4881-AC9C-6AE1D8C2E3B5}"/>
-                </a:ext>
-              </a:extLst>
-            </p:cNvPr>
-            <p:cNvSpPr/>
-            <p:nvPr/>
-          </p:nvSpPr>
-          <p:spPr>
-            <a:xfrm>
-              <a:off x="4197028" y="2087953"/>
-              <a:ext cx="414119" cy="397284"/>
-            </a:xfrm>
-            <a:prstGeom prst="flowChartConnector">
-              <a:avLst/>
-            </a:prstGeom>
-            <a:solidFill>
-              <a:schemeClr val="bg1"/>
-            </a:solidFill>
-            <a:ln>
-              <a:solidFill>
-                <a:schemeClr val="tx1"/>
-              </a:solidFill>
-            </a:ln>
-          </p:spPr>
-          <p:style>
-            <a:lnRef idx="2">
-              <a:schemeClr val="accent1">
-                <a:shade val="50000"/>
-              </a:schemeClr>
-            </a:lnRef>
-            <a:fillRef idx="1">
-              <a:schemeClr val="accent1"/>
-            </a:fillRef>
-            <a:effectRef idx="0">
-              <a:schemeClr val="accent1"/>
-            </a:effectRef>
-            <a:fontRef idx="minor">
-              <a:schemeClr val="lt1"/>
-            </a:fontRef>
-          </p:style>
-          <p:txBody>
-            <a:bodyPr rtlCol="0" anchor="ctr"/>
-            <a:lstStyle/>
-            <a:p>
-              <a:pPr algn="ctr"/>
-              <a:endParaRPr lang="en-US"/>
-            </a:p>
-          </p:txBody>
-        </p:sp>
-        <p:sp>
-          <p:nvSpPr>
-            <p:cNvPr id="92" name="Flowchart: Connector 91">
-              <a:extLst>
-                <a:ext uri="{FF2B5EF4-FFF2-40B4-BE49-F238E27FC236}">
-                  <a16:creationId xmlns:a16="http://schemas.microsoft.com/office/drawing/2014/main" id="{C1BE2B37-B31B-3288-0D35-6621F0DD98D7}"/>
-                </a:ext>
-              </a:extLst>
-            </p:cNvPr>
-            <p:cNvSpPr/>
-            <p:nvPr/>
-          </p:nvSpPr>
-          <p:spPr>
-            <a:xfrm>
-              <a:off x="4187810" y="1616073"/>
-              <a:ext cx="414119" cy="397284"/>
-            </a:xfrm>
-            <a:prstGeom prst="flowChartConnector">
-              <a:avLst/>
-            </a:prstGeom>
-            <a:solidFill>
-              <a:schemeClr val="bg1"/>
-            </a:solidFill>
-            <a:ln>
-              <a:solidFill>
-                <a:schemeClr val="tx1"/>
-              </a:solidFill>
-            </a:ln>
-          </p:spPr>
-          <p:style>
-            <a:lnRef idx="2">
-              <a:schemeClr val="accent1">
-                <a:shade val="50000"/>
-              </a:schemeClr>
-            </a:lnRef>
-            <a:fillRef idx="1">
-              <a:schemeClr val="accent1"/>
-            </a:fillRef>
-            <a:effectRef idx="0">
-              <a:schemeClr val="accent1"/>
-            </a:effectRef>
-            <a:fontRef idx="minor">
-              <a:schemeClr val="lt1"/>
-            </a:fontRef>
-          </p:style>
-          <p:txBody>
-            <a:bodyPr rtlCol="0" anchor="ctr"/>
-            <a:lstStyle/>
-            <a:p>
-              <a:pPr algn="ctr"/>
-              <a:endParaRPr lang="en-US" dirty="0"/>
-            </a:p>
-          </p:txBody>
-        </p:sp>
-        <p:sp>
-          <p:nvSpPr>
-            <p:cNvPr id="93" name="Flowchart: Connector 92">
-              <a:extLst>
-                <a:ext uri="{FF2B5EF4-FFF2-40B4-BE49-F238E27FC236}">
-                  <a16:creationId xmlns:a16="http://schemas.microsoft.com/office/drawing/2014/main" id="{842155A1-5A5F-7062-E8C3-554DF84CF697}"/>
-                </a:ext>
-              </a:extLst>
-            </p:cNvPr>
-            <p:cNvSpPr/>
-            <p:nvPr/>
-          </p:nvSpPr>
-          <p:spPr>
-            <a:xfrm>
-              <a:off x="6442309" y="1616073"/>
-              <a:ext cx="414119" cy="397284"/>
-            </a:xfrm>
-            <a:prstGeom prst="flowChartConnector">
-              <a:avLst/>
-            </a:prstGeom>
-            <a:solidFill>
-              <a:schemeClr val="bg1"/>
-            </a:solidFill>
-            <a:ln>
-              <a:solidFill>
-                <a:schemeClr val="tx1"/>
-              </a:solidFill>
-            </a:ln>
-          </p:spPr>
-          <p:style>
-            <a:lnRef idx="2">
-              <a:schemeClr val="accent1">
-                <a:shade val="50000"/>
-              </a:schemeClr>
-            </a:lnRef>
-            <a:fillRef idx="1">
-              <a:schemeClr val="accent1"/>
-            </a:fillRef>
-            <a:effectRef idx="0">
-              <a:schemeClr val="accent1"/>
-            </a:effectRef>
-            <a:fontRef idx="minor">
-              <a:schemeClr val="lt1"/>
-            </a:fontRef>
-          </p:style>
-          <p:txBody>
-            <a:bodyPr rtlCol="0" anchor="ctr"/>
-            <a:lstStyle/>
-            <a:p>
-              <a:pPr algn="ctr"/>
-              <a:endParaRPr lang="en-US"/>
-            </a:p>
-          </p:txBody>
-        </p:sp>
-        <p:sp>
-          <p:nvSpPr>
-            <p:cNvPr id="94" name="Flowchart: Connector 93">
-              <a:extLst>
-                <a:ext uri="{FF2B5EF4-FFF2-40B4-BE49-F238E27FC236}">
-                  <a16:creationId xmlns:a16="http://schemas.microsoft.com/office/drawing/2014/main" id="{F127DA36-C8D9-7806-1EF5-6F4D4BE9D84F}"/>
-                </a:ext>
-              </a:extLst>
-            </p:cNvPr>
-            <p:cNvSpPr/>
-            <p:nvPr/>
-          </p:nvSpPr>
-          <p:spPr>
-            <a:xfrm>
-              <a:off x="7011185" y="1616073"/>
-              <a:ext cx="414119" cy="397284"/>
-            </a:xfrm>
-            <a:prstGeom prst="flowChartConnector">
-              <a:avLst/>
-            </a:prstGeom>
-            <a:solidFill>
-              <a:schemeClr val="bg1"/>
-            </a:solidFill>
-            <a:ln>
-              <a:solidFill>
-                <a:schemeClr val="tx1"/>
-              </a:solidFill>
-            </a:ln>
-          </p:spPr>
-          <p:style>
-            <a:lnRef idx="2">
-              <a:schemeClr val="accent1">
-                <a:shade val="50000"/>
-              </a:schemeClr>
-            </a:lnRef>
-            <a:fillRef idx="1">
-              <a:schemeClr val="accent1"/>
-            </a:fillRef>
-            <a:effectRef idx="0">
-              <a:schemeClr val="accent1"/>
-            </a:effectRef>
-            <a:fontRef idx="minor">
-              <a:schemeClr val="lt1"/>
-            </a:fontRef>
-          </p:style>
-          <p:txBody>
-            <a:bodyPr rtlCol="0" anchor="ctr"/>
-            <a:lstStyle/>
-            <a:p>
-              <a:pPr algn="ctr"/>
-              <a:endParaRPr lang="en-US"/>
-            </a:p>
-          </p:txBody>
-        </p:sp>
-        <p:sp>
-          <p:nvSpPr>
-            <p:cNvPr id="95" name="Flowchart: Connector 94">
-              <a:extLst>
-                <a:ext uri="{FF2B5EF4-FFF2-40B4-BE49-F238E27FC236}">
-                  <a16:creationId xmlns:a16="http://schemas.microsoft.com/office/drawing/2014/main" id="{4C00045E-2E5A-8B57-07B4-1E878F5269A2}"/>
-                </a:ext>
-              </a:extLst>
-            </p:cNvPr>
-            <p:cNvSpPr/>
-            <p:nvPr/>
-          </p:nvSpPr>
-          <p:spPr>
-            <a:xfrm>
-              <a:off x="7559056" y="1616073"/>
-              <a:ext cx="414119" cy="397284"/>
-            </a:xfrm>
-            <a:prstGeom prst="flowChartConnector">
-              <a:avLst/>
-            </a:prstGeom>
-            <a:solidFill>
-              <a:schemeClr val="bg1"/>
-            </a:solidFill>
-            <a:ln>
-              <a:solidFill>
-                <a:schemeClr val="tx1"/>
-              </a:solidFill>
-            </a:ln>
-          </p:spPr>
-          <p:style>
-            <a:lnRef idx="2">
-              <a:schemeClr val="accent1">
-                <a:shade val="50000"/>
-              </a:schemeClr>
-            </a:lnRef>
-            <a:fillRef idx="1">
-              <a:schemeClr val="accent1"/>
-            </a:fillRef>
-            <a:effectRef idx="0">
-              <a:schemeClr val="accent1"/>
-            </a:effectRef>
-            <a:fontRef idx="minor">
-              <a:schemeClr val="lt1"/>
-            </a:fontRef>
-          </p:style>
-          <p:txBody>
-            <a:bodyPr rtlCol="0" anchor="ctr"/>
-            <a:lstStyle/>
-            <a:p>
-              <a:pPr algn="ctr"/>
-              <a:endParaRPr lang="en-US"/>
-            </a:p>
-          </p:txBody>
-        </p:sp>
-        <p:sp>
-          <p:nvSpPr>
-            <p:cNvPr id="96" name="Flowchart: Connector 95">
-              <a:extLst>
-                <a:ext uri="{FF2B5EF4-FFF2-40B4-BE49-F238E27FC236}">
-                  <a16:creationId xmlns:a16="http://schemas.microsoft.com/office/drawing/2014/main" id="{3725FCD6-8A81-F295-9F43-68C5227531AA}"/>
-                </a:ext>
-              </a:extLst>
-            </p:cNvPr>
-            <p:cNvSpPr/>
-            <p:nvPr/>
-          </p:nvSpPr>
-          <p:spPr>
-            <a:xfrm>
-              <a:off x="7549841" y="2087953"/>
-              <a:ext cx="414119" cy="397284"/>
-            </a:xfrm>
-            <a:prstGeom prst="flowChartConnector">
-              <a:avLst/>
-            </a:prstGeom>
-            <a:solidFill>
-              <a:schemeClr val="bg1"/>
-            </a:solidFill>
-            <a:ln>
-              <a:solidFill>
-                <a:schemeClr val="tx1"/>
-              </a:solidFill>
-            </a:ln>
-          </p:spPr>
-          <p:style>
-            <a:lnRef idx="2">
-              <a:schemeClr val="accent1">
-                <a:shade val="50000"/>
-              </a:schemeClr>
-            </a:lnRef>
-            <a:fillRef idx="1">
-              <a:schemeClr val="accent1"/>
-            </a:fillRef>
-            <a:effectRef idx="0">
-              <a:schemeClr val="accent1"/>
-            </a:effectRef>
-            <a:fontRef idx="minor">
-              <a:schemeClr val="lt1"/>
-            </a:fontRef>
-          </p:style>
-          <p:txBody>
-            <a:bodyPr rtlCol="0" anchor="ctr"/>
-            <a:lstStyle/>
-            <a:p>
-              <a:pPr algn="ctr"/>
-              <a:endParaRPr lang="en-US"/>
             </a:p>
           </p:txBody>
         </p:sp>
@@ -6095,6 +6176,78 @@
 </file>
 
 <file path=ppt/slides/slide5.xml><?xml version="1.0" encoding="utf-8"?>
+<p:sld xmlns:a="http://schemas.openxmlformats.org/drawingml/2006/main" xmlns:r="http://schemas.openxmlformats.org/officeDocument/2006/relationships" xmlns:p="http://schemas.openxmlformats.org/presentationml/2006/main">
+  <p:cSld>
+    <p:spTree>
+      <p:nvGrpSpPr>
+        <p:cNvPr id="1" name=""/>
+        <p:cNvGrpSpPr/>
+        <p:nvPr/>
+      </p:nvGrpSpPr>
+      <p:grpSpPr>
+        <a:xfrm>
+          <a:off x="0" y="0"/>
+          <a:ext cx="0" cy="0"/>
+          <a:chOff x="0" y="0"/>
+          <a:chExt cx="0" cy="0"/>
+        </a:xfrm>
+      </p:grpSpPr>
+      <p:pic>
+        <p:nvPicPr>
+          <p:cNvPr id="3" name="Picture 2" descr="A picture containing text, monitor, screen&#10;&#10;Description automatically generated">
+            <a:extLst>
+              <a:ext uri="{FF2B5EF4-FFF2-40B4-BE49-F238E27FC236}">
+                <a16:creationId xmlns:a16="http://schemas.microsoft.com/office/drawing/2014/main" id="{FF976C48-ED65-C4BF-5BB7-DAE1FEF42148}"/>
+              </a:ext>
+            </a:extLst>
+          </p:cNvPr>
+          <p:cNvPicPr>
+            <a:picLocks noChangeAspect="1"/>
+          </p:cNvPicPr>
+          <p:nvPr/>
+        </p:nvPicPr>
+        <p:blipFill rotWithShape="1">
+          <a:blip r:embed="rId2">
+            <a:duotone>
+              <a:prstClr val="black"/>
+              <a:schemeClr val="accent1">
+                <a:tint val="45000"/>
+                <a:satMod val="400000"/>
+              </a:schemeClr>
+            </a:duotone>
+            <a:extLst>
+              <a:ext uri="{28A0092B-C50C-407E-A947-70E740481C1C}">
+                <a14:useLocalDpi xmlns:a14="http://schemas.microsoft.com/office/drawing/2010/main" val="0"/>
+              </a:ext>
+            </a:extLst>
+          </a:blip>
+          <a:srcRect t="5067"/>
+          <a:stretch/>
+        </p:blipFill>
+        <p:spPr>
+          <a:xfrm>
+            <a:off x="3431745" y="1532770"/>
+            <a:ext cx="5328510" cy="4006297"/>
+          </a:xfrm>
+          <a:prstGeom prst="rect">
+            <a:avLst/>
+          </a:prstGeom>
+        </p:spPr>
+      </p:pic>
+    </p:spTree>
+    <p:extLst>
+      <p:ext uri="{BB962C8B-B14F-4D97-AF65-F5344CB8AC3E}">
+        <p14:creationId xmlns:p14="http://schemas.microsoft.com/office/powerpoint/2010/main" val="636080848"/>
+      </p:ext>
+    </p:extLst>
+  </p:cSld>
+  <p:clrMapOvr>
+    <a:masterClrMapping/>
+  </p:clrMapOvr>
+</p:sld>
+</file>
+
+<file path=ppt/slides/slide6.xml><?xml version="1.0" encoding="utf-8"?>
 <p:sld xmlns:a="http://schemas.openxmlformats.org/drawingml/2006/main" xmlns:r="http://schemas.openxmlformats.org/officeDocument/2006/relationships" xmlns:p="http://schemas.openxmlformats.org/presentationml/2006/main">
   <p:cSld>
     <p:spTree>
@@ -8467,7 +8620,7 @@
 </p:sld>
 </file>
 
-<file path=ppt/slides/slide6.xml><?xml version="1.0" encoding="utf-8"?>
+<file path=ppt/slides/slide7.xml><?xml version="1.0" encoding="utf-8"?>
 <p:sld xmlns:a="http://schemas.openxmlformats.org/drawingml/2006/main" xmlns:r="http://schemas.openxmlformats.org/officeDocument/2006/relationships" xmlns:p="http://schemas.openxmlformats.org/presentationml/2006/main">
   <p:cSld>
     <p:spTree>
@@ -8540,7 +8693,7 @@
 </p:sld>
 </file>
 
-<file path=ppt/slides/slide7.xml><?xml version="1.0" encoding="utf-8"?>
+<file path=ppt/slides/slide8.xml><?xml version="1.0" encoding="utf-8"?>
 <p:sld xmlns:a="http://schemas.openxmlformats.org/drawingml/2006/main" xmlns:r="http://schemas.openxmlformats.org/officeDocument/2006/relationships" xmlns:p="http://schemas.openxmlformats.org/presentationml/2006/main">
   <p:cSld>
     <p:spTree>
@@ -8613,7 +8766,7 @@
         </p:nvSpPr>
         <p:spPr>
           <a:xfrm>
-            <a:off x="4193915" y="1532328"/>
+            <a:off x="3131501" y="3469671"/>
             <a:ext cx="398074" cy="378084"/>
           </a:xfrm>
           <a:prstGeom prst="flowChartConnector">
@@ -8669,7 +8822,7 @@
         </p:nvSpPr>
         <p:spPr>
           <a:xfrm>
-            <a:off x="4193915" y="2044492"/>
+            <a:off x="4286013" y="3623312"/>
             <a:ext cx="398074" cy="378084"/>
           </a:xfrm>
           <a:prstGeom prst="flowChartConnector">

--- a/images/UI_Images.pptx
+++ b/images/UI_Images.pptx
@@ -114,7 +114,7 @@
   <p:extLst>
     <p:ext uri="{EFAFB233-063F-42B5-8137-9DF3F51BA10A}">
       <p15:sldGuideLst xmlns:p15="http://schemas.microsoft.com/office/powerpoint/2012/main">
-        <p15:guide id="1" orient="horz" pos="2160" userDrawn="1">
+        <p15:guide id="1" orient="horz" pos="1752" userDrawn="1">
           <p15:clr>
             <a:srgbClr val="A4A3A4"/>
           </p15:clr>
@@ -3753,10 +3753,10 @@
         </p:nvGrpSpPr>
         <p:grpSpPr>
           <a:xfrm>
-            <a:off x="2576945" y="1019656"/>
-            <a:ext cx="5328063" cy="4215811"/>
-            <a:chOff x="2576945" y="1019656"/>
-            <a:chExt cx="5328063" cy="4215811"/>
+            <a:off x="2576945" y="1124909"/>
+            <a:ext cx="5328063" cy="4110558"/>
+            <a:chOff x="2576945" y="1124909"/>
+            <a:chExt cx="5328063" cy="4110558"/>
           </a:xfrm>
         </p:grpSpPr>
         <p:grpSp>
@@ -6123,8 +6123,8 @@
           </p:nvSpPr>
           <p:spPr>
             <a:xfrm>
-              <a:off x="3016204" y="1019656"/>
-              <a:ext cx="4427275" cy="3456958"/>
+              <a:off x="3016204" y="1124909"/>
+              <a:ext cx="4427275" cy="3346491"/>
             </a:xfrm>
             <a:prstGeom prst="rect">
               <a:avLst/>
@@ -8804,7 +8804,7 @@
           <a:lstStyle/>
           <a:p>
             <a:pPr algn="ctr"/>
-            <a:endParaRPr lang="en-US"/>
+            <a:endParaRPr lang="en-US" dirty="0"/>
           </a:p>
         </p:txBody>
       </p:sp>
@@ -8860,7 +8860,119 @@
           <a:lstStyle/>
           <a:p>
             <a:pPr algn="ctr"/>
-            <a:endParaRPr lang="en-US"/>
+            <a:endParaRPr lang="en-US" dirty="0"/>
+          </a:p>
+        </p:txBody>
+      </p:sp>
+      <p:sp>
+        <p:nvSpPr>
+          <p:cNvPr id="7" name="Flowchart: Connector 6">
+            <a:extLst>
+              <a:ext uri="{FF2B5EF4-FFF2-40B4-BE49-F238E27FC236}">
+                <a16:creationId xmlns:a16="http://schemas.microsoft.com/office/drawing/2014/main" id="{97966C44-C6A4-DCEA-207A-B0D1B0CC8624}"/>
+              </a:ext>
+            </a:extLst>
+          </p:cNvPr>
+          <p:cNvSpPr/>
+          <p:nvPr/>
+        </p:nvSpPr>
+        <p:spPr>
+          <a:xfrm>
+            <a:off x="4246543" y="2122652"/>
+            <a:ext cx="398074" cy="378084"/>
+          </a:xfrm>
+          <a:prstGeom prst="flowChartConnector">
+            <a:avLst/>
+          </a:prstGeom>
+          <a:solidFill>
+            <a:srgbClr val="FF0000"/>
+          </a:solidFill>
+          <a:scene3d>
+            <a:camera prst="isometricOffAxis2Top"/>
+            <a:lightRig rig="threePt" dir="t"/>
+          </a:scene3d>
+          <a:sp3d>
+            <a:bevelT prst="slope"/>
+          </a:sp3d>
+        </p:spPr>
+        <p:style>
+          <a:lnRef idx="2">
+            <a:schemeClr val="accent1">
+              <a:shade val="50000"/>
+            </a:schemeClr>
+          </a:lnRef>
+          <a:fillRef idx="1">
+            <a:schemeClr val="accent1"/>
+          </a:fillRef>
+          <a:effectRef idx="0">
+            <a:schemeClr val="accent1"/>
+          </a:effectRef>
+          <a:fontRef idx="minor">
+            <a:schemeClr val="lt1"/>
+          </a:fontRef>
+        </p:style>
+        <p:txBody>
+          <a:bodyPr rtlCol="0" anchor="ctr"/>
+          <a:lstStyle/>
+          <a:p>
+            <a:pPr algn="ctr"/>
+            <a:endParaRPr lang="en-US" dirty="0"/>
+          </a:p>
+        </p:txBody>
+      </p:sp>
+      <p:sp>
+        <p:nvSpPr>
+          <p:cNvPr id="8" name="Flowchart: Connector 7">
+            <a:extLst>
+              <a:ext uri="{FF2B5EF4-FFF2-40B4-BE49-F238E27FC236}">
+                <a16:creationId xmlns:a16="http://schemas.microsoft.com/office/drawing/2014/main" id="{12420889-93FB-0912-0884-3BCD32A5D86D}"/>
+              </a:ext>
+            </a:extLst>
+          </p:cNvPr>
+          <p:cNvSpPr/>
+          <p:nvPr/>
+        </p:nvSpPr>
+        <p:spPr>
+          <a:xfrm>
+            <a:off x="5214412" y="2147408"/>
+            <a:ext cx="398074" cy="378084"/>
+          </a:xfrm>
+          <a:prstGeom prst="flowChartConnector">
+            <a:avLst/>
+          </a:prstGeom>
+          <a:solidFill>
+            <a:srgbClr val="FFFF00"/>
+          </a:solidFill>
+          <a:scene3d>
+            <a:camera prst="isometricOffAxis1Top"/>
+            <a:lightRig rig="threePt" dir="t"/>
+          </a:scene3d>
+          <a:sp3d>
+            <a:bevelT prst="slope"/>
+          </a:sp3d>
+        </p:spPr>
+        <p:style>
+          <a:lnRef idx="2">
+            <a:schemeClr val="accent1">
+              <a:shade val="50000"/>
+            </a:schemeClr>
+          </a:lnRef>
+          <a:fillRef idx="1">
+            <a:schemeClr val="accent1"/>
+          </a:fillRef>
+          <a:effectRef idx="0">
+            <a:schemeClr val="accent1"/>
+          </a:effectRef>
+          <a:fontRef idx="minor">
+            <a:schemeClr val="lt1"/>
+          </a:fontRef>
+        </p:style>
+        <p:txBody>
+          <a:bodyPr rtlCol="0" anchor="ctr"/>
+          <a:lstStyle/>
+          <a:p>
+            <a:pPr algn="ctr"/>
+            <a:endParaRPr lang="en-US" dirty="0"/>
           </a:p>
         </p:txBody>
       </p:sp>
